--- a/Reports/SVDPowerpoint.pptx
+++ b/Reports/SVDPowerpoint.pptx
@@ -5,7 +5,7 @@
     <p:sldMasterId id="2147483660" r:id="rId1"/>
   </p:sldMasterIdLst>
   <p:notesMasterIdLst>
-    <p:notesMasterId r:id="rId18"/>
+    <p:notesMasterId r:id="rId20"/>
   </p:notesMasterIdLst>
   <p:sldIdLst>
     <p:sldId id="256" r:id="rId2"/>
@@ -17,13 +17,15 @@
     <p:sldId id="269" r:id="rId8"/>
     <p:sldId id="276" r:id="rId9"/>
     <p:sldId id="261" r:id="rId10"/>
-    <p:sldId id="262" r:id="rId11"/>
-    <p:sldId id="263" r:id="rId12"/>
-    <p:sldId id="274" r:id="rId13"/>
-    <p:sldId id="264" r:id="rId14"/>
-    <p:sldId id="265" r:id="rId15"/>
-    <p:sldId id="266" r:id="rId16"/>
-    <p:sldId id="267" r:id="rId17"/>
+    <p:sldId id="277" r:id="rId11"/>
+    <p:sldId id="278" r:id="rId12"/>
+    <p:sldId id="263" r:id="rId13"/>
+    <p:sldId id="274" r:id="rId14"/>
+    <p:sldId id="264" r:id="rId15"/>
+    <p:sldId id="279" r:id="rId16"/>
+    <p:sldId id="265" r:id="rId17"/>
+    <p:sldId id="266" r:id="rId18"/>
+    <p:sldId id="267" r:id="rId19"/>
   </p:sldIdLst>
   <p:sldSz cx="12192000" cy="6858000"/>
   <p:notesSz cx="6858000" cy="9144000"/>
@@ -222,7 +224,7 @@
           <a:p>
             <a:fld id="{9B71C103-2B61-BD4B-A2AC-BBB52336D43A}" type="datetimeFigureOut">
               <a:rPr lang="en-US" smtClean="0"/>
-              <a:t>4/28/22</a:t>
+              <a:t>5/1/22</a:t>
             </a:fld>
             <a:endParaRPr lang="en-US"/>
           </a:p>
@@ -489,90 +491,6 @@
 </p:notesMaster>
 </file>
 
-<file path=ppt/notesSlides/notesSlide1.xml><?xml version="1.0" encoding="utf-8"?>
-<p:notes xmlns:a="http://schemas.openxmlformats.org/drawingml/2006/main" xmlns:r="http://schemas.openxmlformats.org/officeDocument/2006/relationships" xmlns:p="http://schemas.openxmlformats.org/presentationml/2006/main">
-  <p:cSld>
-    <p:spTree>
-      <p:nvGrpSpPr>
-        <p:cNvPr id="1" name=""/>
-        <p:cNvGrpSpPr/>
-        <p:nvPr/>
-      </p:nvGrpSpPr>
-      <p:grpSpPr>
-        <a:xfrm>
-          <a:off x="0" y="0"/>
-          <a:ext cx="0" cy="0"/>
-          <a:chOff x="0" y="0"/>
-          <a:chExt cx="0" cy="0"/>
-        </a:xfrm>
-      </p:grpSpPr>
-      <p:sp>
-        <p:nvSpPr>
-          <p:cNvPr id="2" name="Slide Image Placeholder 1"/>
-          <p:cNvSpPr>
-            <a:spLocks noGrp="1" noRot="1" noChangeAspect="1"/>
-          </p:cNvSpPr>
-          <p:nvPr>
-            <p:ph type="sldImg"/>
-          </p:nvPr>
-        </p:nvSpPr>
-        <p:spPr/>
-      </p:sp>
-      <p:sp>
-        <p:nvSpPr>
-          <p:cNvPr id="3" name="Notes Placeholder 2"/>
-          <p:cNvSpPr>
-            <a:spLocks noGrp="1"/>
-          </p:cNvSpPr>
-          <p:nvPr>
-            <p:ph type="body" idx="1"/>
-          </p:nvPr>
-        </p:nvSpPr>
-        <p:spPr/>
-        <p:txBody>
-          <a:bodyPr/>
-          <a:lstStyle/>
-          <a:p>
-            <a:endParaRPr lang="en-US"/>
-          </a:p>
-        </p:txBody>
-      </p:sp>
-      <p:sp>
-        <p:nvSpPr>
-          <p:cNvPr id="4" name="Slide Number Placeholder 3"/>
-          <p:cNvSpPr>
-            <a:spLocks noGrp="1"/>
-          </p:cNvSpPr>
-          <p:nvPr>
-            <p:ph type="sldNum" sz="quarter" idx="5"/>
-          </p:nvPr>
-        </p:nvSpPr>
-        <p:spPr/>
-        <p:txBody>
-          <a:bodyPr/>
-          <a:lstStyle/>
-          <a:p>
-            <a:fld id="{399E4CBC-AB99-D646-A0C6-09E150C1B0BC}" type="slidenum">
-              <a:rPr lang="en-US" smtClean="0"/>
-              <a:t>10</a:t>
-            </a:fld>
-            <a:endParaRPr lang="en-US"/>
-          </a:p>
-        </p:txBody>
-      </p:sp>
-    </p:spTree>
-    <p:extLst>
-      <p:ext uri="{BB962C8B-B14F-4D97-AF65-F5344CB8AC3E}">
-        <p14:creationId xmlns:p14="http://schemas.microsoft.com/office/powerpoint/2010/main" val="2046718679"/>
-      </p:ext>
-    </p:extLst>
-  </p:cSld>
-  <p:clrMapOvr>
-    <a:masterClrMapping/>
-  </p:clrMapOvr>
-</p:notes>
-</file>
-
 <file path=ppt/slideLayouts/slideLayout1.xml><?xml version="1.0" encoding="utf-8"?>
 <p:sldLayout xmlns:a="http://schemas.openxmlformats.org/drawingml/2006/main" xmlns:r="http://schemas.openxmlformats.org/officeDocument/2006/relationships" xmlns:p="http://schemas.openxmlformats.org/presentationml/2006/main" type="title" preserve="1">
   <p:cSld name="Title Slide">
@@ -817,7 +735,7 @@
             <a:fld id="{B61BEF0D-F0BB-DE4B-95CE-6DB70DBA9567}" type="datetimeFigureOut">
               <a:rPr lang="en-US" smtClean="0"/>
               <a:pPr/>
-              <a:t>4/28/22</a:t>
+              <a:t>5/1/22</a:t>
             </a:fld>
             <a:endParaRPr lang="en-US"/>
           </a:p>
@@ -1079,7 +997,7 @@
             <a:fld id="{B61BEF0D-F0BB-DE4B-95CE-6DB70DBA9567}" type="datetimeFigureOut">
               <a:rPr lang="en-US" smtClean="0"/>
               <a:pPr/>
-              <a:t>4/28/22</a:t>
+              <a:t>5/1/22</a:t>
             </a:fld>
             <a:endParaRPr lang="en-US"/>
           </a:p>
@@ -1314,7 +1232,7 @@
             <a:fld id="{B61BEF0D-F0BB-DE4B-95CE-6DB70DBA9567}" type="datetimeFigureOut">
               <a:rPr lang="en-US" smtClean="0"/>
               <a:pPr/>
-              <a:t>4/28/22</a:t>
+              <a:t>5/1/22</a:t>
             </a:fld>
             <a:endParaRPr lang="en-US"/>
           </a:p>
@@ -1554,7 +1472,7 @@
             <a:fld id="{B61BEF0D-F0BB-DE4B-95CE-6DB70DBA9567}" type="datetimeFigureOut">
               <a:rPr lang="en-US" smtClean="0"/>
               <a:pPr/>
-              <a:t>4/28/22</a:t>
+              <a:t>5/1/22</a:t>
             </a:fld>
             <a:endParaRPr lang="en-US"/>
           </a:p>
@@ -1862,7 +1780,7 @@
             <a:fld id="{B61BEF0D-F0BB-DE4B-95CE-6DB70DBA9567}" type="datetimeFigureOut">
               <a:rPr lang="en-US" smtClean="0"/>
               <a:pPr/>
-              <a:t>4/28/22</a:t>
+              <a:t>5/1/22</a:t>
             </a:fld>
             <a:endParaRPr lang="en-US"/>
           </a:p>
@@ -2163,7 +2081,7 @@
             <a:fld id="{B61BEF0D-F0BB-DE4B-95CE-6DB70DBA9567}" type="datetimeFigureOut">
               <a:rPr lang="en-US" smtClean="0"/>
               <a:pPr/>
-              <a:t>4/28/22</a:t>
+              <a:t>5/1/22</a:t>
             </a:fld>
             <a:endParaRPr lang="en-US"/>
           </a:p>
@@ -2584,7 +2502,7 @@
             <a:fld id="{B61BEF0D-F0BB-DE4B-95CE-6DB70DBA9567}" type="datetimeFigureOut">
               <a:rPr lang="en-US" smtClean="0"/>
               <a:pPr/>
-              <a:t>4/28/22</a:t>
+              <a:t>5/1/22</a:t>
             </a:fld>
             <a:endParaRPr lang="en-US"/>
           </a:p>
@@ -2681,7 +2599,7 @@
             <a:fld id="{B61BEF0D-F0BB-DE4B-95CE-6DB70DBA9567}" type="datetimeFigureOut">
               <a:rPr lang="en-US" smtClean="0"/>
               <a:pPr/>
-              <a:t>4/28/22</a:t>
+              <a:t>5/1/22</a:t>
             </a:fld>
             <a:endParaRPr lang="en-US"/>
           </a:p>
@@ -2844,7 +2762,7 @@
             <a:fld id="{B61BEF0D-F0BB-DE4B-95CE-6DB70DBA9567}" type="datetimeFigureOut">
               <a:rPr lang="en-US" smtClean="0"/>
               <a:pPr/>
-              <a:t>4/28/22</a:t>
+              <a:t>5/1/22</a:t>
             </a:fld>
             <a:endParaRPr lang="en-US"/>
           </a:p>
@@ -3222,7 +3140,7 @@
             <a:fld id="{B61BEF0D-F0BB-DE4B-95CE-6DB70DBA9567}" type="datetimeFigureOut">
               <a:rPr lang="en-US" smtClean="0"/>
               <a:pPr/>
-              <a:t>4/28/22</a:t>
+              <a:t>5/1/22</a:t>
             </a:fld>
             <a:endParaRPr lang="en-US"/>
           </a:p>
@@ -3511,7 +3429,7 @@
             <a:fld id="{B61BEF0D-F0BB-DE4B-95CE-6DB70DBA9567}" type="datetimeFigureOut">
               <a:rPr lang="en-US" smtClean="0"/>
               <a:pPr/>
-              <a:t>4/28/22</a:t>
+              <a:t>5/1/22</a:t>
             </a:fld>
             <a:endParaRPr lang="en-US"/>
           </a:p>
@@ -3722,7 +3640,7 @@
             <a:fld id="{B61BEF0D-F0BB-DE4B-95CE-6DB70DBA9567}" type="datetimeFigureOut">
               <a:rPr lang="en-US" smtClean="0"/>
               <a:pPr/>
-              <a:t>4/28/22</a:t>
+              <a:t>5/1/22</a:t>
             </a:fld>
             <a:endParaRPr lang="en-US"/>
           </a:p>
@@ -4348,7 +4266,7 @@
           <a:lstStyle/>
           <a:p>
             <a:r>
-              <a:rPr lang="en-US"/>
+              <a:rPr lang="en-US" dirty="0"/>
               <a:t>Machine Learning: Handwritten Digit Recognition using Singular Value Decomposition</a:t>
             </a:r>
           </a:p>
@@ -4419,7 +4337,7 @@
         </p:blipFill>
         <p:spPr bwMode="auto">
           <a:xfrm>
-            <a:off x="2833221" y="3624112"/>
+            <a:off x="2833221" y="3676098"/>
             <a:ext cx="2766126" cy="2281777"/>
           </a:xfrm>
           <a:prstGeom prst="rect">
@@ -4500,14 +4418,6 @@
 <file path=ppt/slides/slide10.xml><?xml version="1.0" encoding="utf-8"?>
 <p:sld xmlns:a="http://schemas.openxmlformats.org/drawingml/2006/main" xmlns:r="http://schemas.openxmlformats.org/officeDocument/2006/relationships" xmlns:p="http://schemas.openxmlformats.org/presentationml/2006/main">
   <p:cSld>
-    <p:bg>
-      <p:bgPr>
-        <a:solidFill>
-          <a:schemeClr val="bg1"/>
-        </a:solidFill>
-        <a:effectLst/>
-      </p:bgPr>
-    </p:bg>
     <p:spTree>
       <p:nvGrpSpPr>
         <p:cNvPr id="1" name=""/>
@@ -4524,379 +4434,40 @@
       </p:grpSpPr>
       <p:sp>
         <p:nvSpPr>
-          <p:cNvPr id="11" name="Rectangle 10">
+          <p:cNvPr id="2" name="Title 1">
             <a:extLst>
               <a:ext uri="{FF2B5EF4-FFF2-40B4-BE49-F238E27FC236}">
-                <a16:creationId xmlns:a16="http://schemas.microsoft.com/office/drawing/2014/main" id="{48E96387-12F1-45E4-9322-ABBF2EE040E9}"/>
-              </a:ext>
-              <a:ext uri="{C183D7F6-B498-43B3-948B-1728B52AA6E4}">
-                <adec:decorative xmlns:adec="http://schemas.microsoft.com/office/drawing/2017/decorative" val="1"/>
+                <a16:creationId xmlns:a16="http://schemas.microsoft.com/office/drawing/2014/main" id="{4526685E-4A9E-8863-A29F-5D41D82049C7}"/>
               </a:ext>
             </a:extLst>
           </p:cNvPr>
           <p:cNvSpPr>
-            <a:spLocks noGrp="1" noRot="1" noChangeAspect="1" noMove="1" noResize="1" noEditPoints="1" noAdjustHandles="1" noChangeArrowheads="1" noChangeShapeType="1" noTextEdit="1"/>
-          </p:cNvSpPr>
-          <p:nvPr>
-            <p:extLst>
-              <p:ext uri="{386F3935-93C4-4BCD-93E2-E3B085C9AB24}">
-                <p16:designElem xmlns:p16="http://schemas.microsoft.com/office/powerpoint/2015/main" val="1"/>
-              </p:ext>
-            </p:extLst>
-          </p:nvPr>
-        </p:nvSpPr>
-        <p:spPr>
-          <a:xfrm>
-            <a:off x="446534" y="457200"/>
-            <a:ext cx="3703320" cy="94997"/>
-          </a:xfrm>
-          <a:prstGeom prst="rect">
-            <a:avLst/>
-          </a:prstGeom>
-          <a:solidFill>
-            <a:schemeClr val="accent1"/>
-          </a:solidFill>
-          <a:ln>
-            <a:noFill/>
-          </a:ln>
-          <a:effectLst/>
-        </p:spPr>
-        <p:style>
-          <a:lnRef idx="1">
-            <a:schemeClr val="accent1"/>
-          </a:lnRef>
-          <a:fillRef idx="3">
-            <a:schemeClr val="accent1"/>
-          </a:fillRef>
-          <a:effectRef idx="2">
-            <a:schemeClr val="accent1"/>
-          </a:effectRef>
-          <a:fontRef idx="minor">
-            <a:schemeClr val="lt1"/>
-          </a:fontRef>
-        </p:style>
-      </p:sp>
-      <p:sp>
-        <p:nvSpPr>
-          <p:cNvPr id="13" name="Rectangle 12">
-            <a:extLst>
-              <a:ext uri="{FF2B5EF4-FFF2-40B4-BE49-F238E27FC236}">
-                <a16:creationId xmlns:a16="http://schemas.microsoft.com/office/drawing/2014/main" id="{A9F421DD-DE4E-4547-A904-3F80E25E3F35}"/>
-              </a:ext>
-              <a:ext uri="{C183D7F6-B498-43B3-948B-1728B52AA6E4}">
-                <adec:decorative xmlns:adec="http://schemas.microsoft.com/office/drawing/2017/decorative" val="1"/>
-              </a:ext>
-            </a:extLst>
-          </p:cNvPr>
-          <p:cNvSpPr>
-            <a:spLocks noGrp="1" noRot="1" noChangeAspect="1" noMove="1" noResize="1" noEditPoints="1" noAdjustHandles="1" noChangeArrowheads="1" noChangeShapeType="1" noTextEdit="1"/>
-          </p:cNvSpPr>
-          <p:nvPr>
-            <p:extLst>
-              <p:ext uri="{386F3935-93C4-4BCD-93E2-E3B085C9AB24}">
-                <p16:designElem xmlns:p16="http://schemas.microsoft.com/office/powerpoint/2015/main" val="1"/>
-              </p:ext>
-            </p:extLst>
-          </p:nvPr>
-        </p:nvSpPr>
-        <p:spPr>
-          <a:xfrm>
-            <a:off x="8042147" y="453643"/>
-            <a:ext cx="3703320" cy="98554"/>
-          </a:xfrm>
-          <a:prstGeom prst="rect">
-            <a:avLst/>
-          </a:prstGeom>
-          <a:solidFill>
-            <a:schemeClr val="accent4"/>
-          </a:solidFill>
-          <a:ln>
-            <a:noFill/>
-          </a:ln>
-          <a:effectLst/>
-        </p:spPr>
-        <p:style>
-          <a:lnRef idx="1">
-            <a:schemeClr val="accent1"/>
-          </a:lnRef>
-          <a:fillRef idx="3">
-            <a:schemeClr val="accent1"/>
-          </a:fillRef>
-          <a:effectRef idx="2">
-            <a:schemeClr val="accent1"/>
-          </a:effectRef>
-          <a:fontRef idx="minor">
-            <a:schemeClr val="lt1"/>
-          </a:fontRef>
-        </p:style>
-      </p:sp>
-      <p:sp>
-        <p:nvSpPr>
-          <p:cNvPr id="15" name="Rectangle 14">
-            <a:extLst>
-              <a:ext uri="{FF2B5EF4-FFF2-40B4-BE49-F238E27FC236}">
-                <a16:creationId xmlns:a16="http://schemas.microsoft.com/office/drawing/2014/main" id="{09985DEC-1215-4209-9708-B45CC977402E}"/>
-              </a:ext>
-              <a:ext uri="{C183D7F6-B498-43B3-948B-1728B52AA6E4}">
-                <adec:decorative xmlns:adec="http://schemas.microsoft.com/office/drawing/2017/decorative" val="1"/>
-              </a:ext>
-            </a:extLst>
-          </p:cNvPr>
-          <p:cNvSpPr>
-            <a:spLocks noGrp="1" noRot="1" noChangeAspect="1" noMove="1" noResize="1" noEditPoints="1" noAdjustHandles="1" noChangeArrowheads="1" noChangeShapeType="1" noTextEdit="1"/>
-          </p:cNvSpPr>
-          <p:nvPr>
-            <p:extLst>
-              <p:ext uri="{386F3935-93C4-4BCD-93E2-E3B085C9AB24}">
-                <p16:designElem xmlns:p16="http://schemas.microsoft.com/office/powerpoint/2015/main" val="1"/>
-              </p:ext>
-            </p:extLst>
-          </p:nvPr>
-        </p:nvSpPr>
-        <p:spPr>
-          <a:xfrm>
-            <a:off x="4241830" y="457200"/>
-            <a:ext cx="3703320" cy="91440"/>
-          </a:xfrm>
-          <a:prstGeom prst="rect">
-            <a:avLst/>
-          </a:prstGeom>
-          <a:solidFill>
-            <a:schemeClr val="accent2"/>
-          </a:solidFill>
-          <a:ln>
-            <a:noFill/>
-          </a:ln>
-          <a:effectLst/>
-        </p:spPr>
-        <p:style>
-          <a:lnRef idx="1">
-            <a:schemeClr val="accent1"/>
-          </a:lnRef>
-          <a:fillRef idx="3">
-            <a:schemeClr val="accent1"/>
-          </a:fillRef>
-          <a:effectRef idx="2">
-            <a:schemeClr val="accent1"/>
-          </a:effectRef>
-          <a:fontRef idx="minor">
-            <a:schemeClr val="lt1"/>
-          </a:fontRef>
-        </p:style>
-      </p:sp>
-      <p:sp>
-        <p:nvSpPr>
-          <p:cNvPr id="17" name="Rectangle 16">
-            <a:extLst>
-              <a:ext uri="{FF2B5EF4-FFF2-40B4-BE49-F238E27FC236}">
-                <a16:creationId xmlns:a16="http://schemas.microsoft.com/office/drawing/2014/main" id="{A926A64B-3BCB-44CC-892E-C791C324B7F0}"/>
-              </a:ext>
-              <a:ext uri="{C183D7F6-B498-43B3-948B-1728B52AA6E4}">
-                <adec:decorative xmlns:adec="http://schemas.microsoft.com/office/drawing/2017/decorative" val="1"/>
-              </a:ext>
-            </a:extLst>
-          </p:cNvPr>
-          <p:cNvSpPr>
-            <a:spLocks noGrp="1" noRot="1" noChangeAspect="1" noMove="1" noResize="1" noEditPoints="1" noAdjustHandles="1" noChangeArrowheads="1" noChangeShapeType="1" noTextEdit="1"/>
-          </p:cNvSpPr>
-          <p:nvPr>
-            <p:extLst>
-              <p:ext uri="{386F3935-93C4-4BCD-93E2-E3B085C9AB24}">
-                <p16:designElem xmlns:p16="http://schemas.microsoft.com/office/powerpoint/2015/main" val="1"/>
-              </p:ext>
-            </p:extLst>
-          </p:nvPr>
-        </p:nvSpPr>
-        <p:spPr>
-          <a:xfrm>
-            <a:off x="440286" y="614407"/>
-            <a:ext cx="11309338" cy="1189298"/>
-          </a:xfrm>
-          <a:prstGeom prst="rect">
-            <a:avLst/>
-          </a:prstGeom>
-          <a:solidFill>
-            <a:schemeClr val="accent1"/>
-          </a:solidFill>
-          <a:ln>
-            <a:noFill/>
-          </a:ln>
-          <a:effectLst/>
-        </p:spPr>
-        <p:style>
-          <a:lnRef idx="1">
-            <a:schemeClr val="accent1"/>
-          </a:lnRef>
-          <a:fillRef idx="3">
-            <a:schemeClr val="accent1"/>
-          </a:fillRef>
-          <a:effectRef idx="2">
-            <a:schemeClr val="accent1"/>
-          </a:effectRef>
-          <a:fontRef idx="minor">
-            <a:schemeClr val="lt1"/>
-          </a:fontRef>
-        </p:style>
-      </p:sp>
-      <p:sp useBgFill="1">
-        <p:nvSpPr>
-          <p:cNvPr id="19" name="Rectangle 18">
-            <a:extLst>
-              <a:ext uri="{FF2B5EF4-FFF2-40B4-BE49-F238E27FC236}">
-                <a16:creationId xmlns:a16="http://schemas.microsoft.com/office/drawing/2014/main" id="{8F404549-B4DC-481C-926C-DED3EF1C585B}"/>
-              </a:ext>
-              <a:ext uri="{C183D7F6-B498-43B3-948B-1728B52AA6E4}">
-                <adec:decorative xmlns:adec="http://schemas.microsoft.com/office/drawing/2017/decorative" val="1"/>
-              </a:ext>
-            </a:extLst>
-          </p:cNvPr>
-          <p:cNvSpPr>
-            <a:spLocks noGrp="1" noRot="1" noChangeAspect="1" noMove="1" noResize="1" noEditPoints="1" noAdjustHandles="1" noChangeArrowheads="1" noChangeShapeType="1" noTextEdit="1"/>
-          </p:cNvSpPr>
-          <p:nvPr>
-            <p:extLst>
-              <p:ext uri="{386F3935-93C4-4BCD-93E2-E3B085C9AB24}">
-                <p16:designElem xmlns:p16="http://schemas.microsoft.com/office/powerpoint/2015/main" val="1"/>
-              </p:ext>
-            </p:extLst>
-          </p:nvPr>
-        </p:nvSpPr>
-        <p:spPr>
-          <a:xfrm>
-            <a:off x="0" y="614406"/>
-            <a:ext cx="12192000" cy="6243593"/>
-          </a:xfrm>
-          <a:prstGeom prst="rect">
-            <a:avLst/>
-          </a:prstGeom>
-          <a:ln>
-            <a:noFill/>
-          </a:ln>
-        </p:spPr>
-        <p:style>
-          <a:lnRef idx="2">
-            <a:schemeClr val="accent1">
-              <a:shade val="50000"/>
-            </a:schemeClr>
-          </a:lnRef>
-          <a:fillRef idx="1">
-            <a:schemeClr val="accent1"/>
-          </a:fillRef>
-          <a:effectRef idx="0">
-            <a:schemeClr val="accent1"/>
-          </a:effectRef>
-          <a:fontRef idx="minor">
-            <a:schemeClr val="lt1"/>
-          </a:fontRef>
-        </p:style>
-        <p:txBody>
-          <a:bodyPr rtlCol="0" anchor="ctr"/>
-          <a:lstStyle/>
-          <a:p>
-            <a:pPr algn="ctr"/>
-            <a:endParaRPr lang="en-US"/>
-          </a:p>
-        </p:txBody>
-      </p:sp>
-      <p:sp>
-        <p:nvSpPr>
-          <p:cNvPr id="21" name="Rectangle 20">
-            <a:extLst>
-              <a:ext uri="{FF2B5EF4-FFF2-40B4-BE49-F238E27FC236}">
-                <a16:creationId xmlns:a16="http://schemas.microsoft.com/office/drawing/2014/main" id="{1E8FD5CD-351E-4B06-8B78-BD5102D00908}"/>
-              </a:ext>
-              <a:ext uri="{C183D7F6-B498-43B3-948B-1728B52AA6E4}">
-                <adec:decorative xmlns:adec="http://schemas.microsoft.com/office/drawing/2017/decorative" val="1"/>
-              </a:ext>
-            </a:extLst>
-          </p:cNvPr>
-          <p:cNvSpPr>
-            <a:spLocks noGrp="1" noRot="1" noChangeAspect="1" noMove="1" noResize="1" noEditPoints="1" noAdjustHandles="1" noChangeArrowheads="1" noChangeShapeType="1" noTextEdit="1"/>
-          </p:cNvSpPr>
-          <p:nvPr>
-            <p:extLst>
-              <p:ext uri="{386F3935-93C4-4BCD-93E2-E3B085C9AB24}">
-                <p16:designElem xmlns:p16="http://schemas.microsoft.com/office/powerpoint/2015/main" val="1"/>
-              </p:ext>
-            </p:extLst>
-          </p:nvPr>
-        </p:nvSpPr>
-        <p:spPr>
-          <a:xfrm>
-            <a:off x="442377" y="614407"/>
-            <a:ext cx="3707477" cy="5611772"/>
-          </a:xfrm>
-          <a:prstGeom prst="rect">
-            <a:avLst/>
-          </a:prstGeom>
-          <a:solidFill>
-            <a:schemeClr val="accent1"/>
-          </a:solidFill>
-          <a:ln>
-            <a:noFill/>
-          </a:ln>
-          <a:effectLst/>
-        </p:spPr>
-        <p:style>
-          <a:lnRef idx="1">
-            <a:schemeClr val="accent1"/>
-          </a:lnRef>
-          <a:fillRef idx="3">
-            <a:schemeClr val="accent1"/>
-          </a:fillRef>
-          <a:effectRef idx="2">
-            <a:schemeClr val="accent1"/>
-          </a:effectRef>
-          <a:fontRef idx="minor">
-            <a:schemeClr val="lt1"/>
-          </a:fontRef>
-        </p:style>
-      </p:sp>
-      <p:sp>
-        <p:nvSpPr>
-          <p:cNvPr id="2" name="Title 1">
-            <a:extLst>
-              <a:ext uri="{FF2B5EF4-FFF2-40B4-BE49-F238E27FC236}">
-                <a16:creationId xmlns:a16="http://schemas.microsoft.com/office/drawing/2014/main" id="{1107C678-9D2D-A77A-CBD7-0E1916C1A2D4}"/>
-              </a:ext>
-            </a:extLst>
-          </p:cNvPr>
-          <p:cNvSpPr>
             <a:spLocks noGrp="1"/>
           </p:cNvSpPr>
           <p:nvPr>
             <p:ph type="title"/>
           </p:nvPr>
         </p:nvSpPr>
-        <p:spPr>
-          <a:xfrm>
-            <a:off x="601255" y="702156"/>
-            <a:ext cx="3409783" cy="1013800"/>
-          </a:xfrm>
-        </p:spPr>
-        <p:txBody>
-          <a:bodyPr vert="horz" lIns="91440" tIns="45720" rIns="91440" bIns="45720" rtlCol="0" anchor="b">
-            <a:normAutofit fontScale="90000"/>
-          </a:bodyPr>
+        <p:spPr/>
+        <p:txBody>
+          <a:bodyPr/>
           <a:lstStyle/>
           <a:p>
             <a:r>
-              <a:rPr lang="en-US">
-                <a:latin typeface="Avenir Book" panose="02000503020000020003" pitchFamily="2" charset="0"/>
-              </a:rPr>
-              <a:t>Methods – Linear least Squares</a:t>
-            </a:r>
-          </a:p>
-        </p:txBody>
-      </p:sp>
-      <mc:AlternateContent xmlns:mc="http://schemas.openxmlformats.org/markup-compatibility/2006">
-        <mc:Choice xmlns:a14="http://schemas.microsoft.com/office/drawing/2010/main" Requires="a14">
+              <a:rPr lang="en-US" dirty="0"/>
+              <a:t>Linear least Squares</a:t>
+            </a:r>
+          </a:p>
+        </p:txBody>
+      </p:sp>
+      <mc:AlternateContent xmlns:mc="http://schemas.openxmlformats.org/markup-compatibility/2006" xmlns:a14="http://schemas.microsoft.com/office/drawing/2010/main">
+        <mc:Choice Requires="a14">
           <p:sp>
             <p:nvSpPr>
-              <p:cNvPr id="6" name="TextBox 5">
+              <p:cNvPr id="4" name="TextBox 3">
                 <a:extLst>
                   <a:ext uri="{FF2B5EF4-FFF2-40B4-BE49-F238E27FC236}">
-                    <a16:creationId xmlns:a16="http://schemas.microsoft.com/office/drawing/2014/main" id="{D9609686-B87B-4662-8633-E76569397230}"/>
+                    <a16:creationId xmlns:a16="http://schemas.microsoft.com/office/drawing/2014/main" id="{1EA4CA68-2DD8-246C-7F57-9485B3AC12FD}"/>
                   </a:ext>
                 </a:extLst>
               </p:cNvPr>
@@ -4905,22 +4476,23 @@
             </p:nvSpPr>
             <p:spPr>
               <a:xfrm>
-                <a:off x="590958" y="2025952"/>
-                <a:ext cx="3409782" cy="4036582"/>
+                <a:off x="575894" y="2274838"/>
+                <a:ext cx="10701706" cy="2822119"/>
               </a:xfrm>
               <a:prstGeom prst="rect">
                 <a:avLst/>
               </a:prstGeom>
+              <a:noFill/>
             </p:spPr>
             <p:txBody>
-              <a:bodyPr vert="horz" lIns="91440" tIns="45720" rIns="91440" bIns="45720" rtlCol="0" anchor="ctr">
-                <a:noAutofit/>
+              <a:bodyPr wrap="square" lIns="91440" tIns="45720" rIns="91440" bIns="45720" anchor="t">
+                <a:spAutoFit/>
               </a:bodyPr>
               <a:lstStyle/>
               <a:p>
                 <a:pPr marL="285750" indent="-285750">
                   <a:lnSpc>
-                    <a:spcPct val="90000"/>
+                    <a:spcPct val="150000"/>
                   </a:lnSpc>
                   <a:spcBef>
                     <a:spcPct val="20000"/>
@@ -4936,19 +4508,31 @@
                   <a:buChar char=""/>
                 </a:pPr>
                 <a:r>
-                  <a:rPr lang="en-US">
+                  <a:rPr lang="en-US" sz="2000" dirty="0">
                     <a:solidFill>
-                      <a:schemeClr val="bg1"/>
+                      <a:schemeClr val="tx1"/>
                     </a:solidFill>
                     <a:latin typeface="Avenir Book" panose="02000503020000020003" pitchFamily="2" charset="0"/>
                   </a:rPr>
-                  <a:t>Minimization of classifier</a:t>
+                  <a:t>Minimization </a:t>
                 </a:r>
+                <a:r>
+                  <a:rPr lang="en-US" sz="2000" dirty="0">
+                    <a:latin typeface="Avenir Book" panose="02000503020000020003" pitchFamily="2" charset="0"/>
+                  </a:rPr>
+                  <a:t>of classifier across all 10 digits, where k = 0-9.</a:t>
+                </a:r>
+                <a:endParaRPr lang="en-US" sz="2000" dirty="0">
+                  <a:solidFill>
+                    <a:schemeClr val="tx1"/>
+                  </a:solidFill>
+                  <a:latin typeface="Avenir Book" panose="02000503020000020003" pitchFamily="2" charset="0"/>
+                </a:endParaRPr>
               </a:p>
               <a:p>
                 <a:pPr>
                   <a:lnSpc>
-                    <a:spcPct val="90000"/>
+                    <a:spcPct val="150000"/>
                   </a:lnSpc>
                   <a:spcBef>
                     <a:spcPct val="20000"/>
@@ -4968,61 +4552,37 @@
                     </m:oMathParaPr>
                     <m:oMath xmlns:m="http://schemas.openxmlformats.org/officeDocument/2006/math">
                       <m:r>
-                        <a:rPr kumimoji="0" lang="en-US" b="0" i="1" u="none" strike="noStrike" cap="none" spc="0" normalizeH="0" baseline="0" noProof="0">
-                          <a:ln>
-                            <a:noFill/>
-                          </a:ln>
+                        <a:rPr lang="en-US" sz="2000" i="1">
                           <a:solidFill>
-                            <a:schemeClr val="bg1"/>
+                            <a:schemeClr val="tx1"/>
                           </a:solidFill>
-                          <a:effectLst/>
-                          <a:uLnTx/>
-                          <a:uFillTx/>
                           <a:latin typeface="Cambria Math" panose="02040503050406030204" pitchFamily="18" charset="0"/>
                         </a:rPr>
                         <m:t>𝑏</m:t>
                       </m:r>
                       <m:r>
-                        <a:rPr kumimoji="0" lang="en-US" b="0" i="1" u="none" strike="noStrike" cap="none" spc="0" normalizeH="0" baseline="0" noProof="0">
-                          <a:ln>
-                            <a:noFill/>
-                          </a:ln>
+                        <a:rPr lang="en-US" sz="2000" i="1">
                           <a:solidFill>
-                            <a:schemeClr val="bg1"/>
+                            <a:schemeClr val="tx1"/>
                           </a:solidFill>
-                          <a:effectLst/>
-                          <a:uLnTx/>
-                          <a:uFillTx/>
                           <a:latin typeface="Cambria Math" panose="02040503050406030204" pitchFamily="18" charset="0"/>
                         </a:rPr>
                         <m:t>(</m:t>
                       </m:r>
                       <m:r>
-                        <a:rPr kumimoji="0" lang="en-US" b="0" i="1" u="none" strike="noStrike" cap="none" spc="0" normalizeH="0" baseline="0" noProof="0">
-                          <a:ln>
-                            <a:noFill/>
-                          </a:ln>
+                        <a:rPr lang="en-US" sz="2000" i="1">
                           <a:solidFill>
-                            <a:schemeClr val="bg1"/>
+                            <a:schemeClr val="tx1"/>
                           </a:solidFill>
-                          <a:effectLst/>
-                          <a:uLnTx/>
-                          <a:uFillTx/>
                           <a:latin typeface="Cambria Math" panose="02040503050406030204" pitchFamily="18" charset="0"/>
                         </a:rPr>
                         <m:t>𝑘</m:t>
                       </m:r>
                       <m:r>
-                        <a:rPr kumimoji="0" lang="en-US" b="0" i="1" u="none" strike="noStrike" cap="none" spc="0" normalizeH="0" baseline="0" noProof="0">
-                          <a:ln>
-                            <a:noFill/>
-                          </a:ln>
+                        <a:rPr lang="en-US" sz="2000" i="1">
                           <a:solidFill>
-                            <a:schemeClr val="bg1"/>
+                            <a:schemeClr val="tx1"/>
                           </a:solidFill>
-                          <a:effectLst/>
-                          <a:uLnTx/>
-                          <a:uFillTx/>
                           <a:latin typeface="Cambria Math" panose="02040503050406030204" pitchFamily="18" charset="0"/>
                         </a:rPr>
                         <m:t>)=</m:t>
@@ -5030,16 +4590,10 @@
                       <m:f>
                         <m:fPr>
                           <m:ctrlPr>
-                            <a:rPr kumimoji="0" lang="en-US" b="0" i="1" u="none" strike="noStrike" cap="none" spc="0" normalizeH="0" baseline="0" noProof="0">
-                              <a:ln>
-                                <a:noFill/>
-                              </a:ln>
+                            <a:rPr lang="en-US" sz="2000" i="1">
                               <a:solidFill>
-                                <a:schemeClr val="bg1"/>
+                                <a:schemeClr val="tx1"/>
                               </a:solidFill>
-                              <a:effectLst/>
-                              <a:uLnTx/>
-                              <a:uFillTx/>
                               <a:latin typeface="Cambria Math" panose="02040503050406030204" pitchFamily="18" charset="0"/>
                             </a:rPr>
                           </m:ctrlPr>
@@ -5050,16 +4604,10 @@
                               <m:begChr m:val="‖"/>
                               <m:endChr m:val="‖"/>
                               <m:ctrlPr>
-                                <a:rPr kumimoji="0" lang="en-US" b="0" i="1" u="none" strike="noStrike" cap="none" spc="0" normalizeH="0" baseline="0" noProof="0">
-                                  <a:ln>
-                                    <a:noFill/>
-                                  </a:ln>
+                                <a:rPr lang="en-US" sz="2000" i="1">
                                   <a:solidFill>
-                                    <a:schemeClr val="bg1"/>
+                                    <a:schemeClr val="tx1"/>
                                   </a:solidFill>
-                                  <a:effectLst/>
-                                  <a:uLnTx/>
-                                  <a:uFillTx/>
                                   <a:latin typeface="Cambria Math" panose="02040503050406030204" pitchFamily="18" charset="0"/>
                                 </a:rPr>
                               </m:ctrlPr>
@@ -5068,47 +4616,29 @@
                               <m:d>
                                 <m:dPr>
                                   <m:ctrlPr>
-                                    <a:rPr kumimoji="0" lang="en-US" b="0" i="1" u="none" strike="noStrike" cap="none" spc="0" normalizeH="0" baseline="0" noProof="0">
-                                      <a:ln>
-                                        <a:noFill/>
-                                      </a:ln>
+                                    <a:rPr lang="en-US" sz="2000" i="1">
                                       <a:solidFill>
-                                        <a:schemeClr val="bg1"/>
+                                        <a:schemeClr val="tx1"/>
                                       </a:solidFill>
-                                      <a:effectLst/>
-                                      <a:uLnTx/>
-                                      <a:uFillTx/>
                                       <a:latin typeface="Cambria Math" panose="02040503050406030204" pitchFamily="18" charset="0"/>
                                     </a:rPr>
                                   </m:ctrlPr>
                                 </m:dPr>
                                 <m:e>
                                   <m:r>
-                                    <a:rPr kumimoji="0" lang="en-US" b="0" i="1" u="none" strike="noStrike" cap="none" spc="0" normalizeH="0" baseline="0" noProof="0">
-                                      <a:ln>
-                                        <a:noFill/>
-                                      </a:ln>
+                                    <a:rPr lang="en-US" sz="2000" i="1">
                                       <a:solidFill>
-                                        <a:schemeClr val="bg1"/>
+                                        <a:schemeClr val="tx1"/>
                                       </a:solidFill>
-                                      <a:effectLst/>
-                                      <a:uLnTx/>
-                                      <a:uFillTx/>
                                       <a:latin typeface="Cambria Math" panose="02040503050406030204" pitchFamily="18" charset="0"/>
                                     </a:rPr>
                                     <m:t>𝐼</m:t>
                                   </m:r>
                                   <m:r>
-                                    <a:rPr kumimoji="0" lang="en-US" b="0" i="1" u="none" strike="noStrike" cap="none" spc="0" normalizeH="0" baseline="0" noProof="0">
-                                      <a:ln>
-                                        <a:noFill/>
-                                      </a:ln>
+                                    <a:rPr lang="en-US" sz="2000" i="1">
                                       <a:solidFill>
-                                        <a:schemeClr val="bg1"/>
+                                        <a:schemeClr val="tx1"/>
                                       </a:solidFill>
-                                      <a:effectLst/>
-                                      <a:uLnTx/>
-                                      <a:uFillTx/>
                                       <a:latin typeface="Cambria Math" panose="02040503050406030204" pitchFamily="18" charset="0"/>
                                     </a:rPr>
                                     <m:t>−</m:t>
@@ -5116,32 +4646,20 @@
                                   <m:sSub>
                                     <m:sSubPr>
                                       <m:ctrlPr>
-                                        <a:rPr kumimoji="0" lang="en-US" b="0" i="1" u="none" strike="noStrike" cap="none" spc="0" normalizeH="0" baseline="0" noProof="0">
-                                          <a:ln>
-                                            <a:noFill/>
-                                          </a:ln>
+                                        <a:rPr lang="en-US" sz="2000" i="1">
                                           <a:solidFill>
-                                            <a:schemeClr val="bg1"/>
+                                            <a:schemeClr val="tx1"/>
                                           </a:solidFill>
-                                          <a:effectLst/>
-                                          <a:uLnTx/>
-                                          <a:uFillTx/>
                                           <a:latin typeface="Cambria Math" panose="02040503050406030204" pitchFamily="18" charset="0"/>
                                         </a:rPr>
                                       </m:ctrlPr>
                                     </m:sSubPr>
                                     <m:e>
                                       <m:r>
-                                        <a:rPr kumimoji="0" lang="en-US" b="0" i="1" u="none" strike="noStrike" cap="none" spc="0" normalizeH="0" baseline="0" noProof="0">
-                                          <a:ln>
-                                            <a:noFill/>
-                                          </a:ln>
+                                        <a:rPr lang="en-US" sz="2000" i="1">
                                           <a:solidFill>
-                                            <a:schemeClr val="bg1"/>
+                                            <a:schemeClr val="tx1"/>
                                           </a:solidFill>
-                                          <a:effectLst/>
-                                          <a:uLnTx/>
-                                          <a:uFillTx/>
                                           <a:latin typeface="Cambria Math" panose="02040503050406030204" pitchFamily="18" charset="0"/>
                                         </a:rPr>
                                         <m:t>𝑈</m:t>
@@ -5149,16 +4667,10 @@
                                     </m:e>
                                     <m:sub>
                                       <m:r>
-                                        <a:rPr kumimoji="0" lang="en-US" b="0" i="1" u="none" strike="noStrike" cap="none" spc="0" normalizeH="0" baseline="0" noProof="0">
-                                          <a:ln>
-                                            <a:noFill/>
-                                          </a:ln>
+                                        <a:rPr lang="en-US" sz="2000" i="1">
                                           <a:solidFill>
-                                            <a:schemeClr val="bg1"/>
+                                            <a:schemeClr val="tx1"/>
                                           </a:solidFill>
-                                          <a:effectLst/>
-                                          <a:uLnTx/>
-                                          <a:uFillTx/>
                                           <a:latin typeface="Cambria Math" panose="02040503050406030204" pitchFamily="18" charset="0"/>
                                         </a:rPr>
                                         <m:t>𝑘</m:t>
@@ -5168,32 +4680,20 @@
                                   <m:sSubSup>
                                     <m:sSubSupPr>
                                       <m:ctrlPr>
-                                        <a:rPr kumimoji="0" lang="en-US" b="0" i="1" u="none" strike="noStrike" cap="none" spc="0" normalizeH="0" baseline="0" noProof="0">
-                                          <a:ln>
-                                            <a:noFill/>
-                                          </a:ln>
+                                        <a:rPr lang="en-US" sz="2000" i="1">
                                           <a:solidFill>
-                                            <a:schemeClr val="bg1"/>
+                                            <a:schemeClr val="tx1"/>
                                           </a:solidFill>
-                                          <a:effectLst/>
-                                          <a:uLnTx/>
-                                          <a:uFillTx/>
                                           <a:latin typeface="Cambria Math" panose="02040503050406030204" pitchFamily="18" charset="0"/>
                                         </a:rPr>
                                       </m:ctrlPr>
                                     </m:sSubSupPr>
                                     <m:e>
                                       <m:r>
-                                        <a:rPr kumimoji="0" lang="en-US" b="0" i="1" u="none" strike="noStrike" cap="none" spc="0" normalizeH="0" baseline="0" noProof="0">
-                                          <a:ln>
-                                            <a:noFill/>
-                                          </a:ln>
+                                        <a:rPr lang="en-US" sz="2000" i="1">
                                           <a:solidFill>
-                                            <a:schemeClr val="bg1"/>
+                                            <a:schemeClr val="tx1"/>
                                           </a:solidFill>
-                                          <a:effectLst/>
-                                          <a:uLnTx/>
-                                          <a:uFillTx/>
                                           <a:latin typeface="Cambria Math" panose="02040503050406030204" pitchFamily="18" charset="0"/>
                                         </a:rPr>
                                         <m:t>𝑈</m:t>
@@ -5201,16 +4701,10 @@
                                     </m:e>
                                     <m:sub>
                                       <m:r>
-                                        <a:rPr kumimoji="0" lang="en-US" b="0" i="1" u="none" strike="noStrike" cap="none" spc="0" normalizeH="0" baseline="0" noProof="0">
-                                          <a:ln>
-                                            <a:noFill/>
-                                          </a:ln>
+                                        <a:rPr lang="en-US" sz="2000" i="1">
                                           <a:solidFill>
-                                            <a:schemeClr val="bg1"/>
+                                            <a:schemeClr val="tx1"/>
                                           </a:solidFill>
-                                          <a:effectLst/>
-                                          <a:uLnTx/>
-                                          <a:uFillTx/>
                                           <a:latin typeface="Cambria Math" panose="02040503050406030204" pitchFamily="18" charset="0"/>
                                         </a:rPr>
                                         <m:t>𝑘</m:t>
@@ -5218,16 +4712,10 @@
                                     </m:sub>
                                     <m:sup>
                                       <m:r>
-                                        <a:rPr kumimoji="0" lang="en-US" b="0" i="1" u="none" strike="noStrike" cap="none" spc="0" normalizeH="0" baseline="0" noProof="0">
-                                          <a:ln>
-                                            <a:noFill/>
-                                          </a:ln>
+                                        <a:rPr lang="en-US" sz="2000" i="1">
                                           <a:solidFill>
-                                            <a:schemeClr val="bg1"/>
+                                            <a:schemeClr val="tx1"/>
                                           </a:solidFill>
-                                          <a:effectLst/>
-                                          <a:uLnTx/>
-                                          <a:uFillTx/>
                                           <a:latin typeface="Cambria Math" panose="02040503050406030204" pitchFamily="18" charset="0"/>
                                         </a:rPr>
                                         <m:t>𝑇</m:t>
@@ -5239,32 +4727,20 @@
                               <m:sSub>
                                 <m:sSubPr>
                                   <m:ctrlPr>
-                                    <a:rPr kumimoji="0" lang="en-US" b="0" i="1" u="none" strike="noStrike" cap="none" spc="0" normalizeH="0" baseline="0" noProof="0">
-                                      <a:ln>
-                                        <a:noFill/>
-                                      </a:ln>
+                                    <a:rPr lang="en-US" sz="2000" i="1">
                                       <a:solidFill>
-                                        <a:schemeClr val="bg1"/>
+                                        <a:schemeClr val="tx1"/>
                                       </a:solidFill>
-                                      <a:effectLst/>
-                                      <a:uLnTx/>
-                                      <a:uFillTx/>
                                       <a:latin typeface="Cambria Math" panose="02040503050406030204" pitchFamily="18" charset="0"/>
                                     </a:rPr>
                                   </m:ctrlPr>
                                 </m:sSubPr>
                                 <m:e>
                                   <m:r>
-                                    <a:rPr kumimoji="0" lang="en-US" b="0" i="1" u="none" strike="noStrike" cap="none" spc="0" normalizeH="0" baseline="0" noProof="0">
-                                      <a:ln>
-                                        <a:noFill/>
-                                      </a:ln>
+                                    <a:rPr lang="en-US" sz="2000" i="1">
                                       <a:solidFill>
-                                        <a:schemeClr val="bg1"/>
+                                        <a:schemeClr val="tx1"/>
                                       </a:solidFill>
-                                      <a:effectLst/>
-                                      <a:uLnTx/>
-                                      <a:uFillTx/>
                                       <a:latin typeface="Cambria Math" panose="02040503050406030204" pitchFamily="18" charset="0"/>
                                     </a:rPr>
                                     <m:t>𝑋</m:t>
@@ -5272,16 +4748,10 @@
                                 </m:e>
                                 <m:sub>
                                   <m:r>
-                                    <a:rPr kumimoji="0" lang="en-US" b="0" i="1" u="none" strike="noStrike" cap="none" spc="0" normalizeH="0" baseline="0" noProof="0">
-                                      <a:ln>
-                                        <a:noFill/>
-                                      </a:ln>
+                                    <a:rPr lang="en-US" sz="2000" i="1">
                                       <a:solidFill>
-                                        <a:schemeClr val="bg1"/>
+                                        <a:schemeClr val="tx1"/>
                                       </a:solidFill>
-                                      <a:effectLst/>
-                                      <a:uLnTx/>
-                                      <a:uFillTx/>
                                       <a:latin typeface="Cambria Math" panose="02040503050406030204" pitchFamily="18" charset="0"/>
                                     </a:rPr>
                                     <m:t>𝑖</m:t>
@@ -5297,16 +4767,10 @@
                               <m:begChr m:val="‖"/>
                               <m:endChr m:val="‖"/>
                               <m:ctrlPr>
-                                <a:rPr kumimoji="0" lang="en-US" b="0" i="1" u="none" strike="noStrike" cap="none" spc="0" normalizeH="0" baseline="0" noProof="0">
-                                  <a:ln>
-                                    <a:noFill/>
-                                  </a:ln>
+                                <a:rPr lang="en-US" sz="2000" i="1">
                                   <a:solidFill>
-                                    <a:schemeClr val="bg1"/>
+                                    <a:schemeClr val="tx1"/>
                                   </a:solidFill>
-                                  <a:effectLst/>
-                                  <a:uLnTx/>
-                                  <a:uFillTx/>
                                   <a:latin typeface="Cambria Math" panose="02040503050406030204" pitchFamily="18" charset="0"/>
                                 </a:rPr>
                               </m:ctrlPr>
@@ -5315,32 +4779,20 @@
                               <m:sSub>
                                 <m:sSubPr>
                                   <m:ctrlPr>
-                                    <a:rPr kumimoji="0" lang="en-US" b="0" i="1" u="none" strike="noStrike" cap="none" spc="0" normalizeH="0" baseline="0" noProof="0">
-                                      <a:ln>
-                                        <a:noFill/>
-                                      </a:ln>
+                                    <a:rPr lang="en-US" sz="2000" i="1">
                                       <a:solidFill>
-                                        <a:schemeClr val="bg1"/>
+                                        <a:schemeClr val="tx1"/>
                                       </a:solidFill>
-                                      <a:effectLst/>
-                                      <a:uLnTx/>
-                                      <a:uFillTx/>
                                       <a:latin typeface="Cambria Math" panose="02040503050406030204" pitchFamily="18" charset="0"/>
                                     </a:rPr>
                                   </m:ctrlPr>
                                 </m:sSubPr>
                                 <m:e>
                                   <m:r>
-                                    <a:rPr kumimoji="0" lang="en-US" b="0" i="1" u="none" strike="noStrike" cap="none" spc="0" normalizeH="0" baseline="0" noProof="0">
-                                      <a:ln>
-                                        <a:noFill/>
-                                      </a:ln>
+                                    <a:rPr lang="en-US" sz="2000" i="1">
                                       <a:solidFill>
-                                        <a:schemeClr val="bg1"/>
+                                        <a:schemeClr val="tx1"/>
                                       </a:solidFill>
-                                      <a:effectLst/>
-                                      <a:uLnTx/>
-                                      <a:uFillTx/>
                                       <a:latin typeface="Cambria Math" panose="02040503050406030204" pitchFamily="18" charset="0"/>
                                     </a:rPr>
                                     <m:t>𝑋</m:t>
@@ -5348,16 +4800,10 @@
                                 </m:e>
                                 <m:sub>
                                   <m:r>
-                                    <a:rPr kumimoji="0" lang="en-US" b="0" i="1" u="none" strike="noStrike" cap="none" spc="0" normalizeH="0" baseline="0" noProof="0">
-                                      <a:ln>
-                                        <a:noFill/>
-                                      </a:ln>
+                                    <a:rPr lang="en-US" sz="2000" i="1">
                                       <a:solidFill>
-                                        <a:schemeClr val="bg1"/>
+                                        <a:schemeClr val="tx1"/>
                                       </a:solidFill>
-                                      <a:effectLst/>
-                                      <a:uLnTx/>
-                                      <a:uFillTx/>
                                       <a:latin typeface="Cambria Math" panose="02040503050406030204" pitchFamily="18" charset="0"/>
                                     </a:rPr>
                                     <m:t>𝑖</m:t>
@@ -5371,60 +4817,9 @@
                     </m:oMath>
                   </m:oMathPara>
                 </a14:m>
-                <a:endParaRPr lang="en-US">
+                <a:endParaRPr lang="en-US" sz="2000" dirty="0">
                   <a:solidFill>
-                    <a:schemeClr val="bg1"/>
-                  </a:solidFill>
-                  <a:latin typeface="Avenir Book" panose="02000503020000020003" pitchFamily="2" charset="0"/>
-                </a:endParaRPr>
-              </a:p>
-              <a:p>
-                <a:pPr>
-                  <a:lnSpc>
-                    <a:spcPct val="90000"/>
-                  </a:lnSpc>
-                  <a:spcBef>
-                    <a:spcPct val="20000"/>
-                  </a:spcBef>
-                  <a:spcAft>
-                    <a:spcPts val="600"/>
-                  </a:spcAft>
-                  <a:buClr>
-                    <a:schemeClr val="accent2"/>
-                  </a:buClr>
-                  <a:buSzPct val="92000"/>
-                </a:pPr>
-                <a:r>
-                  <a:rPr lang="en-US">
-                    <a:solidFill>
-                      <a:schemeClr val="bg1"/>
-                    </a:solidFill>
-                    <a:latin typeface="Avenir Book" panose="02000503020000020003" pitchFamily="2" charset="0"/>
-                  </a:rPr>
-                  <a:t>    across all 10 digits (k = 0 – 9)</a:t>
-                </a:r>
-              </a:p>
-              <a:p>
-                <a:pPr>
-                  <a:lnSpc>
-                    <a:spcPct val="90000"/>
-                  </a:lnSpc>
-                  <a:spcBef>
-                    <a:spcPct val="20000"/>
-                  </a:spcBef>
-                  <a:spcAft>
-                    <a:spcPts val="600"/>
-                  </a:spcAft>
-                  <a:buClr>
-                    <a:schemeClr val="accent2"/>
-                  </a:buClr>
-                  <a:buSzPct val="92000"/>
-                  <a:buFont typeface="Wingdings 2" panose="05020102010507070707" pitchFamily="18" charset="2"/>
-                  <a:buChar char=""/>
-                </a:pPr>
-                <a:endParaRPr lang="en-US">
-                  <a:solidFill>
-                    <a:schemeClr val="bg1"/>
+                    <a:schemeClr val="tx1"/>
                   </a:solidFill>
                   <a:latin typeface="Avenir Book" panose="02000503020000020003" pitchFamily="2" charset="0"/>
                 </a:endParaRPr>
@@ -5432,7 +4827,7 @@
               <a:p>
                 <a:pPr marL="285750" indent="-285750">
                   <a:lnSpc>
-                    <a:spcPct val="90000"/>
+                    <a:spcPct val="150000"/>
                   </a:lnSpc>
                   <a:spcBef>
                     <a:spcPct val="20000"/>
@@ -5448,50 +4843,25 @@
                   <a:buChar char=""/>
                 </a:pPr>
                 <a:r>
-                  <a:rPr lang="en-US">
+                  <a:rPr lang="en-US" sz="2000" dirty="0">
                     <a:solidFill>
-                      <a:schemeClr val="bg1"/>
+                      <a:schemeClr val="tx1"/>
                     </a:solidFill>
                     <a:latin typeface="Avenir Book" panose="02000503020000020003" pitchFamily="2" charset="0"/>
                   </a:rPr>
-                  <a:t>Predictions for all images in the test set were compared to their true y-values</a:t>
+                  <a:t>Predictions for all images in the test set were compared to their true y-values.</a:t>
                 </a:r>
               </a:p>
               <a:p>
-                <a:pPr>
+                <a:pPr marL="285750" indent="-285750">
                   <a:lnSpc>
-                    <a:spcPct val="90000"/>
+                    <a:spcPct val="150000"/>
                   </a:lnSpc>
                   <a:spcBef>
                     <a:spcPct val="20000"/>
                   </a:spcBef>
                   <a:spcAft>
-                    <a:spcPts val="600"/>
-                  </a:spcAft>
-                  <a:buClr>
-                    <a:schemeClr val="accent2"/>
-                  </a:buClr>
-                  <a:buSzPct val="92000"/>
-                  <a:buFont typeface="Wingdings 2" panose="05020102010507070707" pitchFamily="18" charset="2"/>
-                  <a:buChar char=""/>
-                </a:pPr>
-                <a:endParaRPr lang="en-US">
-                  <a:solidFill>
-                    <a:schemeClr val="bg1"/>
-                  </a:solidFill>
-                  <a:latin typeface="Avenir Book" panose="02000503020000020003" pitchFamily="2" charset="0"/>
-                </a:endParaRPr>
-              </a:p>
-              <a:p>
-                <a:pPr marL="285750" indent="-285750">
-                  <a:lnSpc>
-                    <a:spcPct val="90000"/>
-                  </a:lnSpc>
-                  <a:spcBef>
-                    <a:spcPct val="20000"/>
-                  </a:spcBef>
-                  <a:spcAft>
-                    <a:spcPts val="600"/>
+                    <a:spcPts val="800"/>
                   </a:spcAft>
                   <a:buClr>
                     <a:schemeClr val="accent2"/>
@@ -5501,25 +4871,22 @@
                   <a:buChar char=""/>
                 </a:pPr>
                 <a:r>
-                  <a:rPr lang="en-US">
-                    <a:solidFill>
-                      <a:schemeClr val="bg1"/>
-                    </a:solidFill>
+                  <a:rPr lang="en-US" sz="2000" dirty="0">
                     <a:latin typeface="Avenir Book" panose="02000503020000020003" pitchFamily="2" charset="0"/>
                   </a:rPr>
-                  <a:t>Highest accuracy percentage at rank-12 approximations of matrices</a:t>
+                  <a:t>Found that rank-12 had the highest accuracy.</a:t>
                 </a:r>
               </a:p>
             </p:txBody>
           </p:sp>
         </mc:Choice>
-        <mc:Fallback>
+        <mc:Fallback xmlns="">
           <p:sp>
             <p:nvSpPr>
-              <p:cNvPr id="6" name="TextBox 5">
+              <p:cNvPr id="4" name="TextBox 3">
                 <a:extLst>
                   <a:ext uri="{FF2B5EF4-FFF2-40B4-BE49-F238E27FC236}">
-                    <a16:creationId xmlns:a16="http://schemas.microsoft.com/office/drawing/2014/main" id="{D9609686-B87B-4662-8633-E76569397230}"/>
+                    <a16:creationId xmlns:a16="http://schemas.microsoft.com/office/drawing/2014/main" id="{1EA4CA68-2DD8-246C-7F57-9485B3AC12FD}"/>
                   </a:ext>
                 </a:extLst>
               </p:cNvPr>
@@ -5530,16 +4897,16 @@
             </p:nvSpPr>
             <p:spPr>
               <a:xfrm>
-                <a:off x="590958" y="2025952"/>
-                <a:ext cx="3409782" cy="4036582"/>
+                <a:off x="575894" y="2274838"/>
+                <a:ext cx="10701706" cy="2822119"/>
               </a:xfrm>
               <a:prstGeom prst="rect">
                 <a:avLst/>
               </a:prstGeom>
               <a:blipFill>
-                <a:blip r:embed="rId3"/>
+                <a:blip r:embed="rId2"/>
                 <a:stretch>
-                  <a:fillRect l="-372" r="-372"/>
+                  <a:fillRect l="-355" b="-3139"/>
                 </a:stretch>
               </a:blipFill>
             </p:spPr>
@@ -5558,12 +4925,80 @@
           </p:sp>
         </mc:Fallback>
       </mc:AlternateContent>
+    </p:spTree>
+    <p:extLst>
+      <p:ext uri="{BB962C8B-B14F-4D97-AF65-F5344CB8AC3E}">
+        <p14:creationId xmlns:p14="http://schemas.microsoft.com/office/powerpoint/2010/main" val="1643669853"/>
+      </p:ext>
+    </p:extLst>
+  </p:cSld>
+  <p:clrMapOvr>
+    <a:masterClrMapping/>
+  </p:clrMapOvr>
+</p:sld>
+</file>
+
+<file path=ppt/slides/slide11.xml><?xml version="1.0" encoding="utf-8"?>
+<p:sld xmlns:a="http://schemas.openxmlformats.org/drawingml/2006/main" xmlns:r="http://schemas.openxmlformats.org/officeDocument/2006/relationships" xmlns:p="http://schemas.openxmlformats.org/presentationml/2006/main">
+  <p:cSld>
+    <p:spTree>
+      <p:nvGrpSpPr>
+        <p:cNvPr id="1" name=""/>
+        <p:cNvGrpSpPr/>
+        <p:nvPr/>
+      </p:nvGrpSpPr>
+      <p:grpSpPr>
+        <a:xfrm>
+          <a:off x="0" y="0"/>
+          <a:ext cx="0" cy="0"/>
+          <a:chOff x="0" y="0"/>
+          <a:chExt cx="0" cy="0"/>
+        </a:xfrm>
+      </p:grpSpPr>
+      <p:sp>
+        <p:nvSpPr>
+          <p:cNvPr id="10" name="TextBox 9">
+            <a:extLst>
+              <a:ext uri="{FF2B5EF4-FFF2-40B4-BE49-F238E27FC236}">
+                <a16:creationId xmlns:a16="http://schemas.microsoft.com/office/drawing/2014/main" id="{EF716726-D7DC-D4FB-60E4-72258BB840D2}"/>
+              </a:ext>
+            </a:extLst>
+          </p:cNvPr>
+          <p:cNvSpPr txBox="1"/>
+          <p:nvPr/>
+        </p:nvSpPr>
+        <p:spPr>
+          <a:xfrm>
+            <a:off x="530299" y="2274838"/>
+            <a:ext cx="11120806" cy="430887"/>
+          </a:xfrm>
+          <a:prstGeom prst="rect">
+            <a:avLst/>
+          </a:prstGeom>
+          <a:noFill/>
+        </p:spPr>
+        <p:txBody>
+          <a:bodyPr wrap="square">
+            <a:spAutoFit/>
+          </a:bodyPr>
+          <a:lstStyle/>
+          <a:p>
+            <a:pPr marL="285750" indent="-285750">
+              <a:buFont typeface="Arial" panose="020B0604020202020204" pitchFamily="34" charset="0"/>
+              <a:buChar char="•"/>
+            </a:pPr>
+            <a:endParaRPr lang="en-US" sz="2200">
+              <a:latin typeface="Avenir Book"/>
+            </a:endParaRPr>
+          </a:p>
+        </p:txBody>
+      </p:sp>
       <p:grpSp>
         <p:nvGrpSpPr>
-          <p:cNvPr id="3" name="Group 67">
+          <p:cNvPr id="5" name="Group 67">
             <a:extLst>
               <a:ext uri="{FF2B5EF4-FFF2-40B4-BE49-F238E27FC236}">
-                <a16:creationId xmlns:a16="http://schemas.microsoft.com/office/drawing/2014/main" id="{F557132B-633A-4291-ABE5-54B27DC2F765}"/>
+                <a16:creationId xmlns:a16="http://schemas.microsoft.com/office/drawing/2014/main" id="{349F8737-71E7-CCB3-86A8-17E73A1F7997}"/>
               </a:ext>
             </a:extLst>
           </p:cNvPr>
@@ -5572,18 +5007,18 @@
         </p:nvGrpSpPr>
         <p:grpSpPr>
           <a:xfrm>
-            <a:off x="4791522" y="1374664"/>
-            <a:ext cx="6489819" cy="4129274"/>
+            <a:off x="1340802" y="699720"/>
+            <a:ext cx="9510395" cy="6051174"/>
             <a:chOff x="17363481" y="21360995"/>
             <a:chExt cx="8429542" cy="5606444"/>
           </a:xfrm>
         </p:grpSpPr>
         <p:sp>
           <p:nvSpPr>
-            <p:cNvPr id="4" name="TextBox 3">
+            <p:cNvPr id="6" name="TextBox 5">
               <a:extLst>
                 <a:ext uri="{FF2B5EF4-FFF2-40B4-BE49-F238E27FC236}">
-                  <a16:creationId xmlns:a16="http://schemas.microsoft.com/office/drawing/2014/main" id="{124D744F-C868-4130-8D2E-F82560AFCB88}"/>
+                  <a16:creationId xmlns:a16="http://schemas.microsoft.com/office/drawing/2014/main" id="{D31D5A2C-8B9E-4837-85D8-B2DC1EB60FCA}"/>
                 </a:ext>
               </a:extLst>
             </p:cNvPr>
@@ -5615,21 +5050,21 @@
                 </a:spcAft>
               </a:pPr>
               <a:r>
-                <a:rPr lang="en-US" sz="1600" i="1">
+                <a:rPr lang="en-US" sz="1400" i="1" dirty="0">
                   <a:latin typeface="Avenir Book"/>
                 </a:rPr>
                 <a:t>Plot comparing the classification accuracy percentage to the rank of the singular value approximations.</a:t>
               </a:r>
-              <a:endParaRPr lang="en-US" sz="1600"/>
+              <a:endParaRPr lang="en-US" sz="1400" dirty="0"/>
             </a:p>
           </p:txBody>
         </p:sp>
         <p:pic>
           <p:nvPicPr>
-            <p:cNvPr id="5" name="Picture 12" descr="Chart, line chart&#10;&#10;Description automatically generated">
+            <p:cNvPr id="9" name="Picture 12" descr="Chart, line chart&#10;&#10;Description automatically generated">
               <a:extLst>
                 <a:ext uri="{FF2B5EF4-FFF2-40B4-BE49-F238E27FC236}">
-                  <a16:creationId xmlns:a16="http://schemas.microsoft.com/office/drawing/2014/main" id="{1D6B66BA-210E-4B64-85CD-A564B04DEC7B}"/>
+                  <a16:creationId xmlns:a16="http://schemas.microsoft.com/office/drawing/2014/main" id="{9E2DDBFC-8B62-5F27-A08B-2F33E86B3FCB}"/>
                 </a:ext>
               </a:extLst>
             </p:cNvPr>
@@ -5639,7 +5074,7 @@
             <p:nvPr/>
           </p:nvPicPr>
           <p:blipFill rotWithShape="1">
-            <a:blip r:embed="rId4"/>
+            <a:blip r:embed="rId2"/>
             <a:srcRect l="5150" r="7386"/>
             <a:stretch/>
           </p:blipFill>
@@ -5657,7 +5092,7 @@
     </p:spTree>
     <p:extLst>
       <p:ext uri="{BB962C8B-B14F-4D97-AF65-F5344CB8AC3E}">
-        <p14:creationId xmlns:p14="http://schemas.microsoft.com/office/powerpoint/2010/main" val="1568434806"/>
+        <p14:creationId xmlns:p14="http://schemas.microsoft.com/office/powerpoint/2010/main" val="2676707872"/>
       </p:ext>
     </p:extLst>
   </p:cSld>
@@ -5667,7 +5102,7 @@
 </p:sld>
 </file>
 
-<file path=ppt/slides/slide11.xml><?xml version="1.0" encoding="utf-8"?>
+<file path=ppt/slides/slide12.xml><?xml version="1.0" encoding="utf-8"?>
 <p:sld xmlns:a="http://schemas.openxmlformats.org/drawingml/2006/main" xmlns:r="http://schemas.openxmlformats.org/officeDocument/2006/relationships" xmlns:p="http://schemas.openxmlformats.org/presentationml/2006/main">
   <p:cSld>
     <p:bg>
@@ -5997,11 +5432,11 @@
           <a:lstStyle/>
           <a:p>
             <a:r>
-              <a:rPr lang="en-US">
+              <a:rPr lang="en-US" dirty="0">
                 <a:solidFill>
-                  <a:schemeClr val="tx1"/>
+                  <a:schemeClr val="accent1"/>
                 </a:solidFill>
-                <a:latin typeface="Avenir Book" panose="02000503020000020003" pitchFamily="2" charset="0"/>
+                <a:latin typeface="+mn-lt"/>
               </a:rPr>
               <a:t>Overall Results</a:t>
             </a:r>
@@ -6219,13 +5654,13 @@
         </p:spPr>
         <p:txBody>
           <a:bodyPr vert="horz" lIns="91440" tIns="45720" rIns="91440" bIns="45720" rtlCol="0" anchor="ctr">
-            <a:normAutofit fontScale="85000" lnSpcReduction="20000"/>
+            <a:normAutofit/>
           </a:bodyPr>
           <a:lstStyle/>
           <a:p>
             <a:pPr marL="342900" indent="-342900">
               <a:lnSpc>
-                <a:spcPct val="120000"/>
+                <a:spcPct val="150000"/>
               </a:lnSpc>
               <a:spcBef>
                 <a:spcPct val="20000"/>
@@ -6241,16 +5676,16 @@
               <a:buChar char=""/>
             </a:pPr>
             <a:r>
-              <a:rPr lang="en-US" sz="2400">
+              <a:rPr lang="en-US" sz="2000" dirty="0">
                 <a:latin typeface="Avenir Book" panose="02000503020000020003" pitchFamily="2" charset="0"/>
               </a:rPr>
-              <a:t>Technologies and packages used: Python using the Anaconda distribution, SciPy, Scikit-Learn, NumPy, h5py, matplotlib.</a:t>
+              <a:t>Technologies: Python Anaconda distribution.</a:t>
             </a:r>
           </a:p>
           <a:p>
             <a:pPr marL="342900" indent="-342900">
               <a:lnSpc>
-                <a:spcPct val="120000"/>
+                <a:spcPct val="150000"/>
               </a:lnSpc>
               <a:spcBef>
                 <a:spcPct val="20000"/>
@@ -6266,10 +5701,60 @@
               <a:buChar char=""/>
             </a:pPr>
             <a:r>
-              <a:rPr lang="en-US" sz="2400">
+              <a:rPr lang="en-US" sz="2000" dirty="0">
                 <a:latin typeface="Avenir Book" panose="02000503020000020003" pitchFamily="2" charset="0"/>
               </a:rPr>
-              <a:t>We applied the classification model, Linear Least Squares, to achieve an accuracy of 94.52% on the prediction of digit values from the testing dataset. Thus, out of 2007 test values, 1,897 were classified correctly.</a:t>
+              <a:t>Packages: SciPy, Scikit-Learn, NumPy, h5py, matplotlib.</a:t>
+            </a:r>
+          </a:p>
+          <a:p>
+            <a:pPr marL="342900" indent="-342900">
+              <a:lnSpc>
+                <a:spcPct val="150000"/>
+              </a:lnSpc>
+              <a:spcBef>
+                <a:spcPct val="20000"/>
+              </a:spcBef>
+              <a:spcAft>
+                <a:spcPts val="600"/>
+              </a:spcAft>
+              <a:buClr>
+                <a:schemeClr val="accent2"/>
+              </a:buClr>
+              <a:buSzPct val="92000"/>
+              <a:buFont typeface="Wingdings 2" panose="05020102010507070707" pitchFamily="18" charset="2"/>
+              <a:buChar char=""/>
+            </a:pPr>
+            <a:r>
+              <a:rPr lang="en-US" sz="2000" dirty="0">
+                <a:latin typeface="Avenir Book" panose="02000503020000020003" pitchFamily="2" charset="0"/>
+              </a:rPr>
+              <a:t>Rank-12 accuracy was 94.52%.</a:t>
+            </a:r>
+          </a:p>
+          <a:p>
+            <a:pPr marL="342900" indent="-342900">
+              <a:lnSpc>
+                <a:spcPct val="150000"/>
+              </a:lnSpc>
+              <a:spcBef>
+                <a:spcPct val="20000"/>
+              </a:spcBef>
+              <a:spcAft>
+                <a:spcPts val="600"/>
+              </a:spcAft>
+              <a:buClr>
+                <a:schemeClr val="accent2"/>
+              </a:buClr>
+              <a:buSzPct val="92000"/>
+              <a:buFont typeface="Wingdings 2" panose="05020102010507070707" pitchFamily="18" charset="2"/>
+              <a:buChar char=""/>
+            </a:pPr>
+            <a:r>
+              <a:rPr lang="en-US" sz="2000" dirty="0">
+                <a:latin typeface="Avenir Book" panose="02000503020000020003" pitchFamily="2" charset="0"/>
+              </a:rPr>
+              <a:t>1897 of 2007 test images were classified correctly.</a:t>
             </a:r>
           </a:p>
         </p:txBody>
@@ -6699,7 +6184,7 @@
 </p:sld>
 </file>
 
-<file path=ppt/slides/slide12.xml><?xml version="1.0" encoding="utf-8"?>
+<file path=ppt/slides/slide13.xml><?xml version="1.0" encoding="utf-8"?>
 <p:sld xmlns:a="http://schemas.openxmlformats.org/drawingml/2006/main" xmlns:r="http://schemas.openxmlformats.org/officeDocument/2006/relationships" xmlns:p="http://schemas.openxmlformats.org/presentationml/2006/main">
   <p:cSld>
     <p:spTree>
@@ -6738,7 +6223,7 @@
           <a:lstStyle/>
           <a:p>
             <a:r>
-              <a:rPr lang="en-US"/>
+              <a:rPr lang="en-US" dirty="0"/>
               <a:t>Individual Digit Accuracy</a:t>
             </a:r>
           </a:p>
@@ -6765,8 +6250,8 @@
         </p:blipFill>
         <p:spPr>
           <a:xfrm>
-            <a:off x="7078133" y="2080280"/>
-            <a:ext cx="4594955" cy="4269720"/>
+            <a:off x="7257122" y="2030853"/>
+            <a:ext cx="4595523" cy="4270248"/>
           </a:xfrm>
           <a:prstGeom prst="rect">
             <a:avLst/>
@@ -6787,8 +6272,8 @@
         </p:nvSpPr>
         <p:spPr>
           <a:xfrm>
-            <a:off x="662960" y="2182505"/>
-            <a:ext cx="6096000" cy="3600986"/>
+            <a:off x="662959" y="2182505"/>
+            <a:ext cx="6145613" cy="3150671"/>
           </a:xfrm>
           <a:prstGeom prst="rect">
             <a:avLst/>
@@ -6802,47 +6287,89 @@
           <a:lstStyle/>
           <a:p>
             <a:pPr marL="285750" indent="-285750">
+              <a:lnSpc>
+                <a:spcPct val="150000"/>
+              </a:lnSpc>
+              <a:spcBef>
+                <a:spcPct val="20000"/>
+              </a:spcBef>
               <a:spcAft>
-                <a:spcPts val="1800"/>
+                <a:spcPts val="800"/>
               </a:spcAft>
-              <a:buFont typeface="Arial" panose="020B0604020202020204" pitchFamily="34" charset="0"/>
-              <a:buChar char="•"/>
+              <a:buClr>
+                <a:schemeClr val="accent2"/>
+              </a:buClr>
+              <a:buSzPct val="92000"/>
+              <a:buFont typeface="Wingdings 2" panose="05020102010507070707" pitchFamily="18" charset="2"/>
+              <a:buChar char=""/>
             </a:pPr>
             <a:r>
-              <a:rPr lang="en-US" sz="2200">
+              <a:rPr lang="en-US" sz="2000" dirty="0">
                 <a:latin typeface="Avenir Book"/>
               </a:rPr>
-              <a:t>The individual success rate of each digit differs in accordance with the complexity of the digit, along with the cleanliness of the rank-12 matrix approximations.</a:t>
+              <a:t>Success rate of each digit differs in accordance with the complexity of the digit and cleanliness of the rank-12 matrix approximations.</a:t>
             </a:r>
           </a:p>
           <a:p>
             <a:pPr marL="285750" indent="-285750">
+              <a:lnSpc>
+                <a:spcPct val="150000"/>
+              </a:lnSpc>
+              <a:spcBef>
+                <a:spcPct val="20000"/>
+              </a:spcBef>
               <a:spcAft>
-                <a:spcPts val="1800"/>
+                <a:spcPts val="800"/>
               </a:spcAft>
-              <a:buFont typeface="Arial" panose="020B0604020202020204" pitchFamily="34" charset="0"/>
-              <a:buChar char="•"/>
+              <a:buClr>
+                <a:schemeClr val="accent2"/>
+              </a:buClr>
+              <a:buSzPct val="92000"/>
+              <a:buFont typeface="Wingdings 2" panose="05020102010507070707" pitchFamily="18" charset="2"/>
+              <a:buChar char=""/>
             </a:pPr>
             <a:r>
-              <a:rPr lang="en-US" sz="2200">
+              <a:rPr lang="en-US" sz="2000" dirty="0">
                 <a:latin typeface="Avenir Book"/>
               </a:rPr>
-              <a:t>An accuracy of 86.70% for digit 3 was the lowest.</a:t>
+              <a:t>Accuracy of digit 3 was the lowest at 86.70%.</a:t>
             </a:r>
           </a:p>
           <a:p>
             <a:pPr marL="285750" indent="-285750">
+              <a:lnSpc>
+                <a:spcPct val="150000"/>
+              </a:lnSpc>
+              <a:spcBef>
+                <a:spcPct val="20000"/>
+              </a:spcBef>
               <a:spcAft>
-                <a:spcPts val="1800"/>
+                <a:spcPts val="800"/>
               </a:spcAft>
-              <a:buFont typeface="Arial" panose="020B0604020202020204" pitchFamily="34" charset="0"/>
-              <a:buChar char="•"/>
+              <a:buClr>
+                <a:schemeClr val="accent2"/>
+              </a:buClr>
+              <a:buSzPct val="92000"/>
+              <a:buFont typeface="Wingdings 2" panose="05020102010507070707" pitchFamily="18" charset="2"/>
+              <a:buChar char=""/>
             </a:pPr>
             <a:r>
-              <a:rPr lang="en-US" sz="2200">
+              <a:rPr lang="en-US" sz="2000" dirty="0">
                 <a:latin typeface="Avenir Book"/>
               </a:rPr>
-              <a:t>Digit 0, while having the largest population in the dataset, also performed the best with an accuracy of 98.60%.</a:t>
+              <a:t>Digit 0, with </a:t>
+            </a:r>
+            <a:r>
+              <a:rPr lang="en-US" sz="2000">
+                <a:latin typeface="Avenir Book"/>
+              </a:rPr>
+              <a:t>the greatest number </a:t>
+            </a:r>
+            <a:r>
+              <a:rPr lang="en-US" sz="2000" dirty="0">
+                <a:latin typeface="Avenir Book"/>
+              </a:rPr>
+              <a:t>of samples, had the highest accuracy at 98.60%.</a:t>
             </a:r>
           </a:p>
         </p:txBody>
@@ -6851,476 +6378,6 @@
     <p:extLst>
       <p:ext uri="{BB962C8B-B14F-4D97-AF65-F5344CB8AC3E}">
         <p14:creationId xmlns:p14="http://schemas.microsoft.com/office/powerpoint/2010/main" val="2198053744"/>
-      </p:ext>
-    </p:extLst>
-  </p:cSld>
-  <p:clrMapOvr>
-    <a:masterClrMapping/>
-  </p:clrMapOvr>
-</p:sld>
-</file>
-
-<file path=ppt/slides/slide13.xml><?xml version="1.0" encoding="utf-8"?>
-<p:sld xmlns:a="http://schemas.openxmlformats.org/drawingml/2006/main" xmlns:r="http://schemas.openxmlformats.org/officeDocument/2006/relationships" xmlns:p="http://schemas.openxmlformats.org/presentationml/2006/main">
-  <p:cSld>
-    <p:spTree>
-      <p:nvGrpSpPr>
-        <p:cNvPr id="1" name=""/>
-        <p:cNvGrpSpPr/>
-        <p:nvPr/>
-      </p:nvGrpSpPr>
-      <p:grpSpPr>
-        <a:xfrm>
-          <a:off x="0" y="0"/>
-          <a:ext cx="0" cy="0"/>
-          <a:chOff x="0" y="0"/>
-          <a:chExt cx="0" cy="0"/>
-        </a:xfrm>
-      </p:grpSpPr>
-      <p:sp>
-        <p:nvSpPr>
-          <p:cNvPr id="2" name="Title 1">
-            <a:extLst>
-              <a:ext uri="{FF2B5EF4-FFF2-40B4-BE49-F238E27FC236}">
-                <a16:creationId xmlns:a16="http://schemas.microsoft.com/office/drawing/2014/main" id="{59783E96-D84A-B40B-E246-C6D3439D79E6}"/>
-              </a:ext>
-            </a:extLst>
-          </p:cNvPr>
-          <p:cNvSpPr>
-            <a:spLocks noGrp="1"/>
-          </p:cNvSpPr>
-          <p:nvPr>
-            <p:ph type="title"/>
-          </p:nvPr>
-        </p:nvSpPr>
-        <p:spPr/>
-        <p:txBody>
-          <a:bodyPr/>
-          <a:lstStyle/>
-          <a:p>
-            <a:r>
-              <a:rPr lang="en-US"/>
-              <a:t>Error Analysis</a:t>
-            </a:r>
-          </a:p>
-        </p:txBody>
-      </p:sp>
-      <p:sp>
-        <p:nvSpPr>
-          <p:cNvPr id="4" name="TextBox 3">
-            <a:extLst>
-              <a:ext uri="{FF2B5EF4-FFF2-40B4-BE49-F238E27FC236}">
-                <a16:creationId xmlns:a16="http://schemas.microsoft.com/office/drawing/2014/main" id="{EB7EF742-A1B7-696D-769B-C75B7E01DC34}"/>
-              </a:ext>
-            </a:extLst>
-          </p:cNvPr>
-          <p:cNvSpPr txBox="1"/>
-          <p:nvPr/>
-        </p:nvSpPr>
-        <p:spPr>
-          <a:xfrm>
-            <a:off x="575894" y="2117812"/>
-            <a:ext cx="11320464" cy="2462213"/>
-          </a:xfrm>
-          <a:prstGeom prst="rect">
-            <a:avLst/>
-          </a:prstGeom>
-          <a:noFill/>
-        </p:spPr>
-        <p:txBody>
-          <a:bodyPr wrap="square">
-            <a:spAutoFit/>
-          </a:bodyPr>
-          <a:lstStyle/>
-          <a:p>
-            <a:pPr marL="285750" indent="-285750">
-              <a:buFont typeface="Arial" panose="020B0604020202020204" pitchFamily="34" charset="0"/>
-              <a:buChar char="•"/>
-            </a:pPr>
-            <a:r>
-              <a:rPr lang="en-US" sz="2200">
-                <a:latin typeface="Avenir Book"/>
-              </a:rPr>
-              <a:t>There were a total of the 110 misclassified digits when using the rank-12 matrix approximation.</a:t>
-            </a:r>
-          </a:p>
-          <a:p>
-            <a:pPr marL="285750" indent="-285750">
-              <a:buFont typeface="Arial" panose="020B0604020202020204" pitchFamily="34" charset="0"/>
-              <a:buChar char="•"/>
-            </a:pPr>
-            <a:r>
-              <a:rPr lang="en-US" sz="2200">
-                <a:latin typeface="Avenir Book"/>
-              </a:rPr>
-              <a:t>Many of the misclassifications were a result of misplacement and skewedness </a:t>
-            </a:r>
-          </a:p>
-          <a:p>
-            <a:pPr marL="285750" indent="-285750">
-              <a:buFont typeface="Arial" panose="020B0604020202020204" pitchFamily="34" charset="0"/>
-              <a:buChar char="•"/>
-            </a:pPr>
-            <a:r>
-              <a:rPr lang="en-US" sz="2200">
-                <a:latin typeface="Avenir Book"/>
-              </a:rPr>
-              <a:t>Digits 3, 5, and 8 were often misclassified as the other.</a:t>
-            </a:r>
-          </a:p>
-          <a:p>
-            <a:pPr marL="285750" indent="-285750">
-              <a:buFont typeface="Arial" panose="020B0604020202020204" pitchFamily="34" charset="0"/>
-              <a:buChar char="•"/>
-            </a:pPr>
-            <a:r>
-              <a:rPr lang="en-US" sz="2200">
-                <a:latin typeface="Avenir Book"/>
-              </a:rPr>
-              <a:t>Digits 1 and 7 were often misclassified as the other.</a:t>
-            </a:r>
-          </a:p>
-          <a:p>
-            <a:pPr marL="285750" indent="-285750">
-              <a:buFont typeface="Arial" panose="020B0604020202020204" pitchFamily="34" charset="0"/>
-              <a:buChar char="•"/>
-            </a:pPr>
-            <a:r>
-              <a:rPr lang="en-US" sz="2200">
-                <a:latin typeface="Avenir Book"/>
-              </a:rPr>
-              <a:t>Digits with pronounced loops were often misclassified as Digit 0.</a:t>
-            </a:r>
-          </a:p>
-          <a:p>
-            <a:pPr marL="285750" indent="-285750">
-              <a:buFont typeface="Arial" panose="020B0604020202020204" pitchFamily="34" charset="0"/>
-              <a:buChar char="•"/>
-            </a:pPr>
-            <a:r>
-              <a:rPr lang="en-US" sz="2200">
-                <a:latin typeface="Avenir Book"/>
-              </a:rPr>
-              <a:t>Digits with pronounced lines were often misclassified as Digit 1.</a:t>
-            </a:r>
-          </a:p>
-        </p:txBody>
-      </p:sp>
-      <p:grpSp>
-        <p:nvGrpSpPr>
-          <p:cNvPr id="16" name="Group 15">
-            <a:extLst>
-              <a:ext uri="{FF2B5EF4-FFF2-40B4-BE49-F238E27FC236}">
-                <a16:creationId xmlns:a16="http://schemas.microsoft.com/office/drawing/2014/main" id="{A77ADA73-2B80-9FC7-19FC-2A1430D1457C}"/>
-              </a:ext>
-            </a:extLst>
-          </p:cNvPr>
-          <p:cNvGrpSpPr/>
-          <p:nvPr/>
-        </p:nvGrpSpPr>
-        <p:grpSpPr>
-          <a:xfrm>
-            <a:off x="868008" y="4676628"/>
-            <a:ext cx="10625486" cy="1871203"/>
-            <a:chOff x="30084165" y="15744117"/>
-            <a:chExt cx="6153704" cy="1008322"/>
-          </a:xfrm>
-        </p:grpSpPr>
-        <p:pic>
-          <p:nvPicPr>
-            <p:cNvPr id="17" name="Picture 16">
-              <a:extLst>
-                <a:ext uri="{FF2B5EF4-FFF2-40B4-BE49-F238E27FC236}">
-                  <a16:creationId xmlns:a16="http://schemas.microsoft.com/office/drawing/2014/main" id="{44923C0D-EF7D-71B1-C2EB-D8AC05AB8E7C}"/>
-                </a:ext>
-              </a:extLst>
-            </p:cNvPr>
-            <p:cNvPicPr>
-              <a:picLocks noChangeAspect="1"/>
-            </p:cNvPicPr>
-            <p:nvPr/>
-          </p:nvPicPr>
-          <p:blipFill rotWithShape="1">
-            <a:blip r:embed="rId2"/>
-            <a:srcRect l="51032" t="78248" r="40139" b="3251"/>
-            <a:stretch/>
-          </p:blipFill>
-          <p:spPr>
-            <a:xfrm>
-              <a:off x="35659339" y="15843132"/>
-              <a:ext cx="578530" cy="909307"/>
-            </a:xfrm>
-            <a:prstGeom prst="rect">
-              <a:avLst/>
-            </a:prstGeom>
-          </p:spPr>
-        </p:pic>
-        <p:pic>
-          <p:nvPicPr>
-            <p:cNvPr id="18" name="Picture 17">
-              <a:extLst>
-                <a:ext uri="{FF2B5EF4-FFF2-40B4-BE49-F238E27FC236}">
-                  <a16:creationId xmlns:a16="http://schemas.microsoft.com/office/drawing/2014/main" id="{A44AFE90-9023-FBB6-0DB6-FA032A120A08}"/>
-                </a:ext>
-              </a:extLst>
-            </p:cNvPr>
-            <p:cNvPicPr>
-              <a:picLocks noChangeAspect="1"/>
-            </p:cNvPicPr>
-            <p:nvPr/>
-          </p:nvPicPr>
-          <p:blipFill rotWithShape="1">
-            <a:blip r:embed="rId3"/>
-            <a:srcRect l="80404" r="11273" b="80236"/>
-            <a:stretch/>
-          </p:blipFill>
-          <p:spPr>
-            <a:xfrm>
-              <a:off x="32542823" y="15744117"/>
-              <a:ext cx="545387" cy="971388"/>
-            </a:xfrm>
-            <a:prstGeom prst="rect">
-              <a:avLst/>
-            </a:prstGeom>
-          </p:spPr>
-        </p:pic>
-        <p:pic>
-          <p:nvPicPr>
-            <p:cNvPr id="19" name="Picture 18">
-              <a:extLst>
-                <a:ext uri="{FF2B5EF4-FFF2-40B4-BE49-F238E27FC236}">
-                  <a16:creationId xmlns:a16="http://schemas.microsoft.com/office/drawing/2014/main" id="{6940403C-D625-B132-2CB8-22302072CBC6}"/>
-                </a:ext>
-              </a:extLst>
-            </p:cNvPr>
-            <p:cNvPicPr>
-              <a:picLocks noChangeAspect="1"/>
-            </p:cNvPicPr>
-            <p:nvPr/>
-          </p:nvPicPr>
-          <p:blipFill rotWithShape="1">
-            <a:blip r:embed="rId3"/>
-            <a:srcRect l="12216" t="57847" r="79463" b="22932"/>
-            <a:stretch/>
-          </p:blipFill>
-          <p:spPr>
-            <a:xfrm>
-              <a:off x="33791250" y="15778367"/>
-              <a:ext cx="545387" cy="944682"/>
-            </a:xfrm>
-            <a:prstGeom prst="rect">
-              <a:avLst/>
-            </a:prstGeom>
-          </p:spPr>
-        </p:pic>
-        <p:pic>
-          <p:nvPicPr>
-            <p:cNvPr id="20" name="Picture 19">
-              <a:extLst>
-                <a:ext uri="{FF2B5EF4-FFF2-40B4-BE49-F238E27FC236}">
-                  <a16:creationId xmlns:a16="http://schemas.microsoft.com/office/drawing/2014/main" id="{BF5CA731-0459-71BB-7AE5-81C6CEF1C747}"/>
-                </a:ext>
-              </a:extLst>
-            </p:cNvPr>
-            <p:cNvPicPr>
-              <a:picLocks noChangeAspect="1"/>
-            </p:cNvPicPr>
-            <p:nvPr/>
-          </p:nvPicPr>
-          <p:blipFill rotWithShape="1">
-            <a:blip r:embed="rId3"/>
-            <a:srcRect l="70723" t="20236" r="20746" b="60981"/>
-            <a:stretch/>
-          </p:blipFill>
-          <p:spPr>
-            <a:xfrm>
-              <a:off x="30084165" y="15789803"/>
-              <a:ext cx="558973" cy="923166"/>
-            </a:xfrm>
-            <a:prstGeom prst="rect">
-              <a:avLst/>
-            </a:prstGeom>
-          </p:spPr>
-        </p:pic>
-        <p:pic>
-          <p:nvPicPr>
-            <p:cNvPr id="21" name="Picture 20">
-              <a:extLst>
-                <a:ext uri="{FF2B5EF4-FFF2-40B4-BE49-F238E27FC236}">
-                  <a16:creationId xmlns:a16="http://schemas.microsoft.com/office/drawing/2014/main" id="{62B50DB9-DC41-09EE-59F5-1E9D5C516F5B}"/>
-                </a:ext>
-              </a:extLst>
-            </p:cNvPr>
-            <p:cNvPicPr>
-              <a:picLocks noChangeAspect="1"/>
-            </p:cNvPicPr>
-            <p:nvPr/>
-          </p:nvPicPr>
-          <p:blipFill rotWithShape="1">
-            <a:blip r:embed="rId2"/>
-            <a:srcRect l="31690" t="20203" r="59987" b="62122"/>
-            <a:stretch/>
-          </p:blipFill>
-          <p:spPr>
-            <a:xfrm>
-              <a:off x="34427028" y="15805496"/>
-              <a:ext cx="545387" cy="868726"/>
-            </a:xfrm>
-            <a:prstGeom prst="rect">
-              <a:avLst/>
-            </a:prstGeom>
-          </p:spPr>
-        </p:pic>
-        <p:pic>
-          <p:nvPicPr>
-            <p:cNvPr id="22" name="Picture 21">
-              <a:extLst>
-                <a:ext uri="{FF2B5EF4-FFF2-40B4-BE49-F238E27FC236}">
-                  <a16:creationId xmlns:a16="http://schemas.microsoft.com/office/drawing/2014/main" id="{023F3B02-2CBB-C28F-50E2-70DBC244D026}"/>
-                </a:ext>
-              </a:extLst>
-            </p:cNvPr>
-            <p:cNvPicPr>
-              <a:picLocks noChangeAspect="1"/>
-            </p:cNvPicPr>
-            <p:nvPr/>
-          </p:nvPicPr>
-          <p:blipFill rotWithShape="1">
-            <a:blip r:embed="rId2"/>
-            <a:srcRect l="40788" t="79683" r="49862" b="5240"/>
-            <a:stretch/>
-          </p:blipFill>
-          <p:spPr>
-            <a:xfrm>
-              <a:off x="30659805" y="15895985"/>
-              <a:ext cx="612742" cy="741018"/>
-            </a:xfrm>
-            <a:prstGeom prst="rect">
-              <a:avLst/>
-            </a:prstGeom>
-          </p:spPr>
-        </p:pic>
-        <p:pic>
-          <p:nvPicPr>
-            <p:cNvPr id="23" name="Picture 22">
-              <a:extLst>
-                <a:ext uri="{FF2B5EF4-FFF2-40B4-BE49-F238E27FC236}">
-                  <a16:creationId xmlns:a16="http://schemas.microsoft.com/office/drawing/2014/main" id="{68AE8CFF-7AC4-AA24-0F68-C7FB07EE0276}"/>
-                </a:ext>
-              </a:extLst>
-            </p:cNvPr>
-            <p:cNvPicPr>
-              <a:picLocks noChangeAspect="1"/>
-            </p:cNvPicPr>
-            <p:nvPr/>
-          </p:nvPicPr>
-          <p:blipFill rotWithShape="1">
-            <a:blip r:embed="rId2"/>
-            <a:srcRect l="31286" t="2600" r="59670" b="80228"/>
-            <a:stretch/>
-          </p:blipFill>
-          <p:spPr>
-            <a:xfrm>
-              <a:off x="33137416" y="15874584"/>
-              <a:ext cx="592667" cy="844025"/>
-            </a:xfrm>
-            <a:prstGeom prst="rect">
-              <a:avLst/>
-            </a:prstGeom>
-          </p:spPr>
-        </p:pic>
-        <p:pic>
-          <p:nvPicPr>
-            <p:cNvPr id="24" name="Picture 23">
-              <a:extLst>
-                <a:ext uri="{FF2B5EF4-FFF2-40B4-BE49-F238E27FC236}">
-                  <a16:creationId xmlns:a16="http://schemas.microsoft.com/office/drawing/2014/main" id="{A029E210-A40D-2DE5-3D90-FF25C3C59CDE}"/>
-                </a:ext>
-              </a:extLst>
-            </p:cNvPr>
-            <p:cNvPicPr>
-              <a:picLocks noChangeAspect="1"/>
-            </p:cNvPicPr>
-            <p:nvPr/>
-          </p:nvPicPr>
-          <p:blipFill rotWithShape="1">
-            <a:blip r:embed="rId2"/>
-            <a:srcRect l="31563" t="60071" r="60116" b="22713"/>
-            <a:stretch/>
-          </p:blipFill>
-          <p:spPr>
-            <a:xfrm>
-              <a:off x="31313015" y="15872317"/>
-              <a:ext cx="545387" cy="846122"/>
-            </a:xfrm>
-            <a:prstGeom prst="rect">
-              <a:avLst/>
-            </a:prstGeom>
-          </p:spPr>
-        </p:pic>
-        <p:pic>
-          <p:nvPicPr>
-            <p:cNvPr id="25" name="Picture 24">
-              <a:extLst>
-                <a:ext uri="{FF2B5EF4-FFF2-40B4-BE49-F238E27FC236}">
-                  <a16:creationId xmlns:a16="http://schemas.microsoft.com/office/drawing/2014/main" id="{49DF4AAC-33EF-11FA-DA72-785C01AEC0C4}"/>
-                </a:ext>
-              </a:extLst>
-            </p:cNvPr>
-            <p:cNvPicPr>
-              <a:picLocks noChangeAspect="1"/>
-            </p:cNvPicPr>
-            <p:nvPr/>
-          </p:nvPicPr>
-          <p:blipFill rotWithShape="1">
-            <a:blip r:embed="rId3"/>
-            <a:srcRect l="11645" t="78233" r="79182" b="4877"/>
-            <a:stretch/>
-          </p:blipFill>
-          <p:spPr>
-            <a:xfrm>
-              <a:off x="31901007" y="15826519"/>
-              <a:ext cx="601134" cy="830109"/>
-            </a:xfrm>
-            <a:prstGeom prst="rect">
-              <a:avLst/>
-            </a:prstGeom>
-          </p:spPr>
-        </p:pic>
-        <p:pic>
-          <p:nvPicPr>
-            <p:cNvPr id="26" name="Picture 25">
-              <a:extLst>
-                <a:ext uri="{FF2B5EF4-FFF2-40B4-BE49-F238E27FC236}">
-                  <a16:creationId xmlns:a16="http://schemas.microsoft.com/office/drawing/2014/main" id="{CE286EA8-629D-7FFC-E1F9-305F95B24042}"/>
-                </a:ext>
-              </a:extLst>
-            </p:cNvPr>
-            <p:cNvPicPr>
-              <a:picLocks noChangeAspect="1"/>
-            </p:cNvPicPr>
-            <p:nvPr/>
-          </p:nvPicPr>
-          <p:blipFill rotWithShape="1">
-            <a:blip r:embed="rId2"/>
-            <a:srcRect l="80078" t="40918" r="11094" b="43096"/>
-            <a:stretch/>
-          </p:blipFill>
-          <p:spPr>
-            <a:xfrm>
-              <a:off x="35020151" y="15883642"/>
-              <a:ext cx="578530" cy="785727"/>
-            </a:xfrm>
-            <a:prstGeom prst="rect">
-              <a:avLst/>
-            </a:prstGeom>
-          </p:spPr>
-        </p:pic>
-      </p:grpSp>
-    </p:spTree>
-    <p:extLst>
-      <p:ext uri="{BB962C8B-B14F-4D97-AF65-F5344CB8AC3E}">
-        <p14:creationId xmlns:p14="http://schemas.microsoft.com/office/powerpoint/2010/main" val="1830990826"/>
       </p:ext>
     </p:extLst>
   </p:cSld>
@@ -7352,7 +6409,7 @@
           <p:cNvPr id="2" name="Title 1">
             <a:extLst>
               <a:ext uri="{FF2B5EF4-FFF2-40B4-BE49-F238E27FC236}">
-                <a16:creationId xmlns:a16="http://schemas.microsoft.com/office/drawing/2014/main" id="{F2FBDD74-3537-0AF2-DDBC-80526B30EC8D}"/>
+                <a16:creationId xmlns:a16="http://schemas.microsoft.com/office/drawing/2014/main" id="{59783E96-D84A-B40B-E246-C6D3439D79E6}"/>
               </a:ext>
             </a:extLst>
           </p:cNvPr>
@@ -7369,8 +6426,8 @@
           <a:lstStyle/>
           <a:p>
             <a:r>
-              <a:rPr lang="en-US"/>
-              <a:t>Conclusion</a:t>
+              <a:rPr lang="en-US" dirty="0"/>
+              <a:t>Error Analysis</a:t>
             </a:r>
           </a:p>
         </p:txBody>
@@ -7380,7 +6437,7 @@
           <p:cNvPr id="4" name="TextBox 3">
             <a:extLst>
               <a:ext uri="{FF2B5EF4-FFF2-40B4-BE49-F238E27FC236}">
-                <a16:creationId xmlns:a16="http://schemas.microsoft.com/office/drawing/2014/main" id="{60DE80C0-2C22-4C25-E70B-C704DBC75763}"/>
+                <a16:creationId xmlns:a16="http://schemas.microsoft.com/office/drawing/2014/main" id="{EB7EF742-A1B7-696D-769B-C75B7E01DC34}"/>
               </a:ext>
             </a:extLst>
           </p:cNvPr>
@@ -7389,8 +6446,8 @@
         </p:nvSpPr>
         <p:spPr>
           <a:xfrm>
-            <a:off x="575894" y="2369041"/>
-            <a:ext cx="11029616" cy="3816429"/>
+            <a:off x="575894" y="2117812"/>
+            <a:ext cx="11320464" cy="3643113"/>
           </a:xfrm>
           <a:prstGeom prst="rect">
             <a:avLst/>
@@ -7404,77 +6461,152 @@
           <a:lstStyle/>
           <a:p>
             <a:pPr marL="285750" indent="-285750">
-              <a:buFont typeface="Arial" panose="020B0604020202020204" pitchFamily="34" charset="0"/>
-              <a:buChar char="•"/>
+              <a:lnSpc>
+                <a:spcPct val="150000"/>
+              </a:lnSpc>
+              <a:spcBef>
+                <a:spcPct val="20000"/>
+              </a:spcBef>
+              <a:spcAft>
+                <a:spcPts val="800"/>
+              </a:spcAft>
+              <a:buClr>
+                <a:schemeClr val="accent2"/>
+              </a:buClr>
+              <a:buSzPct val="92000"/>
+              <a:buFont typeface="Wingdings 2" panose="05020102010507070707" pitchFamily="18" charset="2"/>
+              <a:buChar char=""/>
             </a:pPr>
             <a:r>
-              <a:rPr lang="en-US" sz="2200">
+              <a:rPr lang="en-US" sz="2000" dirty="0">
                 <a:latin typeface="Avenir Book"/>
               </a:rPr>
-              <a:t>SVD and Linear Least Squares were able to successfully predict handwritten digits with a high accuracy (&gt;94%). </a:t>
+              <a:t>110 total misclassified digits for the rank-12 matrix approximation.</a:t>
             </a:r>
           </a:p>
           <a:p>
             <a:pPr marL="285750" indent="-285750">
-              <a:buFont typeface="Arial" panose="020B0604020202020204" pitchFamily="34" charset="0"/>
-              <a:buChar char="•"/>
+              <a:lnSpc>
+                <a:spcPct val="150000"/>
+              </a:lnSpc>
+              <a:spcBef>
+                <a:spcPct val="20000"/>
+              </a:spcBef>
+              <a:spcAft>
+                <a:spcPts val="800"/>
+              </a:spcAft>
+              <a:buClr>
+                <a:schemeClr val="accent2"/>
+              </a:buClr>
+              <a:buSzPct val="92000"/>
+              <a:buFont typeface="Wingdings 2" panose="05020102010507070707" pitchFamily="18" charset="2"/>
+              <a:buChar char=""/>
             </a:pPr>
-            <a:endParaRPr lang="en-US" sz="2200">
-              <a:latin typeface="Avenir Book"/>
-            </a:endParaRPr>
-          </a:p>
-          <a:p>
-            <a:pPr marL="285750" indent="-285750">
-              <a:buFont typeface="Arial" panose="020B0604020202020204" pitchFamily="34" charset="0"/>
-              <a:buChar char="•"/>
-            </a:pPr>
-            <a:r>
-              <a:rPr lang="en-US" sz="2200">
+            <a:r>
+              <a:rPr lang="en-US" sz="2000" dirty="0">
                 <a:latin typeface="Avenir Book"/>
               </a:rPr>
-              <a:t>Ultimately, the model can be used in a variety of applications, such as quickly interpreting postal codes and addresses on mail and packages. </a:t>
+              <a:t>Many misclassifications were a result of misplacement and skewedness. </a:t>
             </a:r>
           </a:p>
           <a:p>
             <a:pPr marL="285750" indent="-285750">
-              <a:buFont typeface="Arial" panose="020B0604020202020204" pitchFamily="34" charset="0"/>
-              <a:buChar char="•"/>
+              <a:lnSpc>
+                <a:spcPct val="150000"/>
+              </a:lnSpc>
+              <a:spcBef>
+                <a:spcPct val="20000"/>
+              </a:spcBef>
+              <a:spcAft>
+                <a:spcPts val="800"/>
+              </a:spcAft>
+              <a:buClr>
+                <a:schemeClr val="accent2"/>
+              </a:buClr>
+              <a:buSzPct val="92000"/>
+              <a:buFont typeface="Wingdings 2" panose="05020102010507070707" pitchFamily="18" charset="2"/>
+              <a:buChar char=""/>
             </a:pPr>
-            <a:endParaRPr lang="en-US" sz="2200">
-              <a:latin typeface="Avenir Book"/>
-            </a:endParaRPr>
-          </a:p>
-          <a:p>
-            <a:pPr marL="285750" indent="-285750">
-              <a:buFont typeface="Arial" panose="020B0604020202020204" pitchFamily="34" charset="0"/>
-              <a:buChar char="•"/>
-            </a:pPr>
-            <a:r>
-              <a:rPr lang="en-US" sz="2200">
+            <a:r>
+              <a:rPr lang="en-US" sz="2000" dirty="0">
                 <a:latin typeface="Avenir Book"/>
               </a:rPr>
-              <a:t>In general, machine learning algorithms such as ours can be used to recognize any handwritten digits, like financial documents, mathematical writing, etc.</a:t>
+              <a:t>Digits 3, 5, and 8 were often misclassified as the other.</a:t>
             </a:r>
           </a:p>
           <a:p>
             <a:pPr marL="285750" indent="-285750">
-              <a:buFont typeface="Arial" panose="020B0604020202020204" pitchFamily="34" charset="0"/>
-              <a:buChar char="•"/>
+              <a:lnSpc>
+                <a:spcPct val="150000"/>
+              </a:lnSpc>
+              <a:spcBef>
+                <a:spcPct val="20000"/>
+              </a:spcBef>
+              <a:spcAft>
+                <a:spcPts val="800"/>
+              </a:spcAft>
+              <a:buClr>
+                <a:schemeClr val="accent2"/>
+              </a:buClr>
+              <a:buSzPct val="92000"/>
+              <a:buFont typeface="Wingdings 2" panose="05020102010507070707" pitchFamily="18" charset="2"/>
+              <a:buChar char=""/>
             </a:pPr>
-            <a:endParaRPr lang="en-US" sz="2200">
-              <a:latin typeface="Avenir Book"/>
-            </a:endParaRPr>
-          </a:p>
-          <a:p>
-            <a:pPr marL="285750" indent="-285750">
-              <a:buFont typeface="Arial" panose="020B0604020202020204" pitchFamily="34" charset="0"/>
-              <a:buChar char="•"/>
-            </a:pPr>
-            <a:r>
-              <a:rPr lang="en-US" sz="2200">
+            <a:r>
+              <a:rPr lang="en-US" sz="2000" dirty="0">
                 <a:latin typeface="Avenir Book"/>
               </a:rPr>
-              <a:t>Additionally, the model can be augmented to learn not only digits, but also the modern Latin alphabet, or any language’s alphabet.</a:t>
+              <a:t>Digits 1 and 7 were often misclassified as the other.</a:t>
+            </a:r>
+          </a:p>
+          <a:p>
+            <a:pPr marL="285750" indent="-285750">
+              <a:lnSpc>
+                <a:spcPct val="150000"/>
+              </a:lnSpc>
+              <a:spcBef>
+                <a:spcPct val="20000"/>
+              </a:spcBef>
+              <a:spcAft>
+                <a:spcPts val="800"/>
+              </a:spcAft>
+              <a:buClr>
+                <a:schemeClr val="accent2"/>
+              </a:buClr>
+              <a:buSzPct val="92000"/>
+              <a:buFont typeface="Wingdings 2" panose="05020102010507070707" pitchFamily="18" charset="2"/>
+              <a:buChar char=""/>
+            </a:pPr>
+            <a:r>
+              <a:rPr lang="en-US" sz="2000" dirty="0">
+                <a:latin typeface="Avenir Book"/>
+              </a:rPr>
+              <a:t>Digits with pronounced loops were often misclassified as Digit 0.</a:t>
+            </a:r>
+          </a:p>
+          <a:p>
+            <a:pPr marL="285750" indent="-285750">
+              <a:lnSpc>
+                <a:spcPct val="150000"/>
+              </a:lnSpc>
+              <a:spcBef>
+                <a:spcPct val="20000"/>
+              </a:spcBef>
+              <a:spcAft>
+                <a:spcPts val="800"/>
+              </a:spcAft>
+              <a:buClr>
+                <a:schemeClr val="accent2"/>
+              </a:buClr>
+              <a:buSzPct val="92000"/>
+              <a:buFont typeface="Wingdings 2" panose="05020102010507070707" pitchFamily="18" charset="2"/>
+              <a:buChar char=""/>
+            </a:pPr>
+            <a:r>
+              <a:rPr lang="en-US" sz="2000" dirty="0">
+                <a:latin typeface="Avenir Book"/>
+              </a:rPr>
+              <a:t>Digits with pronounced lines were often misclassified as Digit 1.</a:t>
             </a:r>
           </a:p>
         </p:txBody>
@@ -7482,7 +6614,7 @@
     </p:spTree>
     <p:extLst>
       <p:ext uri="{BB962C8B-B14F-4D97-AF65-F5344CB8AC3E}">
-        <p14:creationId xmlns:p14="http://schemas.microsoft.com/office/powerpoint/2010/main" val="492093351"/>
+        <p14:creationId xmlns:p14="http://schemas.microsoft.com/office/powerpoint/2010/main" val="1830990826"/>
       </p:ext>
     </p:extLst>
   </p:cSld>
@@ -7511,38 +6643,10 @@
       </p:grpSpPr>
       <p:sp>
         <p:nvSpPr>
-          <p:cNvPr id="2" name="Title 1">
+          <p:cNvPr id="10" name="TextBox 9">
             <a:extLst>
               <a:ext uri="{FF2B5EF4-FFF2-40B4-BE49-F238E27FC236}">
-                <a16:creationId xmlns:a16="http://schemas.microsoft.com/office/drawing/2014/main" id="{34B8A9E2-4A95-6D3B-0B20-FA68D23F5B37}"/>
-              </a:ext>
-            </a:extLst>
-          </p:cNvPr>
-          <p:cNvSpPr>
-            <a:spLocks noGrp="1"/>
-          </p:cNvSpPr>
-          <p:nvPr>
-            <p:ph type="title"/>
-          </p:nvPr>
-        </p:nvSpPr>
-        <p:spPr/>
-        <p:txBody>
-          <a:bodyPr/>
-          <a:lstStyle/>
-          <a:p>
-            <a:r>
-              <a:rPr lang="en-US"/>
-              <a:t>Takeaways</a:t>
-            </a:r>
-          </a:p>
-        </p:txBody>
-      </p:sp>
-      <p:sp>
-        <p:nvSpPr>
-          <p:cNvPr id="15" name="TextBox 14">
-            <a:extLst>
-              <a:ext uri="{FF2B5EF4-FFF2-40B4-BE49-F238E27FC236}">
-                <a16:creationId xmlns:a16="http://schemas.microsoft.com/office/drawing/2014/main" id="{439713D9-B8A0-E5AC-46CC-DFDFEAEDC738}"/>
+                <a16:creationId xmlns:a16="http://schemas.microsoft.com/office/drawing/2014/main" id="{EF716726-D7DC-D4FB-60E4-72258BB840D2}"/>
               </a:ext>
             </a:extLst>
           </p:cNvPr>
@@ -7551,8 +6655,8 @@
         </p:nvSpPr>
         <p:spPr>
           <a:xfrm>
-            <a:off x="575895" y="2284281"/>
-            <a:ext cx="10701706" cy="1446550"/>
+            <a:off x="530299" y="2274838"/>
+            <a:ext cx="11120806" cy="430887"/>
           </a:xfrm>
           <a:prstGeom prst="rect">
             <a:avLst/>
@@ -7560,22 +6664,10 @@
           <a:noFill/>
         </p:spPr>
         <p:txBody>
-          <a:bodyPr wrap="square" lIns="91440" tIns="45720" rIns="91440" bIns="45720" anchor="t">
+          <a:bodyPr wrap="square">
             <a:spAutoFit/>
           </a:bodyPr>
           <a:lstStyle/>
-          <a:p>
-            <a:pPr marL="285750" indent="-285750">
-              <a:buFont typeface="Arial" panose="020B0604020202020204" pitchFamily="34" charset="0"/>
-              <a:buChar char="•"/>
-            </a:pPr>
-            <a:r>
-              <a:rPr lang="en-US" sz="2200">
-                <a:latin typeface="Avenir Book"/>
-              </a:rPr>
-              <a:t>Learning the applications and usefulness of SVD and its ability to perform dimensionality reductions. </a:t>
-            </a:r>
-          </a:p>
           <a:p>
             <a:pPr marL="285750" indent="-285750">
               <a:buFont typeface="Arial" panose="020B0604020202020204" pitchFamily="34" charset="0"/>
@@ -7585,24 +6677,361 @@
               <a:latin typeface="Avenir Book"/>
             </a:endParaRPr>
           </a:p>
-          <a:p>
-            <a:pPr marL="285750" indent="-285750">
-              <a:buFont typeface="Arial" panose="020B0604020202020204" pitchFamily="34" charset="0"/>
-              <a:buChar char="•"/>
-            </a:pPr>
-            <a:r>
-              <a:rPr lang="en-US" sz="2200">
+        </p:txBody>
+      </p:sp>
+      <p:grpSp>
+        <p:nvGrpSpPr>
+          <p:cNvPr id="7" name="Group 6">
+            <a:extLst>
+              <a:ext uri="{FF2B5EF4-FFF2-40B4-BE49-F238E27FC236}">
+                <a16:creationId xmlns:a16="http://schemas.microsoft.com/office/drawing/2014/main" id="{97D8C154-D1CD-2910-6462-08E6C99B0951}"/>
+              </a:ext>
+            </a:extLst>
+          </p:cNvPr>
+          <p:cNvGrpSpPr/>
+          <p:nvPr/>
+        </p:nvGrpSpPr>
+        <p:grpSpPr>
+          <a:xfrm>
+            <a:off x="777959" y="2490281"/>
+            <a:ext cx="10625486" cy="1874520"/>
+            <a:chOff x="30084165" y="15744117"/>
+            <a:chExt cx="6153704" cy="1008322"/>
+          </a:xfrm>
+        </p:grpSpPr>
+        <p:pic>
+          <p:nvPicPr>
+            <p:cNvPr id="8" name="Picture 7">
+              <a:extLst>
+                <a:ext uri="{FF2B5EF4-FFF2-40B4-BE49-F238E27FC236}">
+                  <a16:creationId xmlns:a16="http://schemas.microsoft.com/office/drawing/2014/main" id="{C0547FF3-8AA0-0AA6-8063-2CCC6BAF86DE}"/>
+                </a:ext>
+              </a:extLst>
+            </p:cNvPr>
+            <p:cNvPicPr>
+              <a:picLocks noChangeAspect="1"/>
+            </p:cNvPicPr>
+            <p:nvPr/>
+          </p:nvPicPr>
+          <p:blipFill rotWithShape="1">
+            <a:blip r:embed="rId2"/>
+            <a:srcRect l="51032" t="78248" r="40139" b="3251"/>
+            <a:stretch/>
+          </p:blipFill>
+          <p:spPr>
+            <a:xfrm>
+              <a:off x="35659339" y="15843132"/>
+              <a:ext cx="578530" cy="909307"/>
+            </a:xfrm>
+            <a:prstGeom prst="rect">
+              <a:avLst/>
+            </a:prstGeom>
+          </p:spPr>
+        </p:pic>
+        <p:pic>
+          <p:nvPicPr>
+            <p:cNvPr id="11" name="Picture 10">
+              <a:extLst>
+                <a:ext uri="{FF2B5EF4-FFF2-40B4-BE49-F238E27FC236}">
+                  <a16:creationId xmlns:a16="http://schemas.microsoft.com/office/drawing/2014/main" id="{9212B908-319D-1A70-3673-F6B513AAC8CC}"/>
+                </a:ext>
+              </a:extLst>
+            </p:cNvPr>
+            <p:cNvPicPr>
+              <a:picLocks noChangeAspect="1"/>
+            </p:cNvPicPr>
+            <p:nvPr/>
+          </p:nvPicPr>
+          <p:blipFill rotWithShape="1">
+            <a:blip r:embed="rId3"/>
+            <a:srcRect l="80404" r="11273" b="80236"/>
+            <a:stretch/>
+          </p:blipFill>
+          <p:spPr>
+            <a:xfrm>
+              <a:off x="32542823" y="15744117"/>
+              <a:ext cx="545387" cy="971388"/>
+            </a:xfrm>
+            <a:prstGeom prst="rect">
+              <a:avLst/>
+            </a:prstGeom>
+          </p:spPr>
+        </p:pic>
+        <p:pic>
+          <p:nvPicPr>
+            <p:cNvPr id="12" name="Picture 11">
+              <a:extLst>
+                <a:ext uri="{FF2B5EF4-FFF2-40B4-BE49-F238E27FC236}">
+                  <a16:creationId xmlns:a16="http://schemas.microsoft.com/office/drawing/2014/main" id="{71C07318-EE65-9289-1F44-BF2726A6DD86}"/>
+                </a:ext>
+              </a:extLst>
+            </p:cNvPr>
+            <p:cNvPicPr>
+              <a:picLocks noChangeAspect="1"/>
+            </p:cNvPicPr>
+            <p:nvPr/>
+          </p:nvPicPr>
+          <p:blipFill rotWithShape="1">
+            <a:blip r:embed="rId3"/>
+            <a:srcRect l="12216" t="57847" r="79463" b="22932"/>
+            <a:stretch/>
+          </p:blipFill>
+          <p:spPr>
+            <a:xfrm>
+              <a:off x="33791250" y="15778367"/>
+              <a:ext cx="545387" cy="944682"/>
+            </a:xfrm>
+            <a:prstGeom prst="rect">
+              <a:avLst/>
+            </a:prstGeom>
+          </p:spPr>
+        </p:pic>
+        <p:pic>
+          <p:nvPicPr>
+            <p:cNvPr id="13" name="Picture 12">
+              <a:extLst>
+                <a:ext uri="{FF2B5EF4-FFF2-40B4-BE49-F238E27FC236}">
+                  <a16:creationId xmlns:a16="http://schemas.microsoft.com/office/drawing/2014/main" id="{D07E3955-3FF7-0667-8D6E-1F23F2681F71}"/>
+                </a:ext>
+              </a:extLst>
+            </p:cNvPr>
+            <p:cNvPicPr>
+              <a:picLocks noChangeAspect="1"/>
+            </p:cNvPicPr>
+            <p:nvPr/>
+          </p:nvPicPr>
+          <p:blipFill rotWithShape="1">
+            <a:blip r:embed="rId3"/>
+            <a:srcRect l="70723" t="20236" r="20746" b="60981"/>
+            <a:stretch/>
+          </p:blipFill>
+          <p:spPr>
+            <a:xfrm>
+              <a:off x="30084165" y="15789803"/>
+              <a:ext cx="558973" cy="923166"/>
+            </a:xfrm>
+            <a:prstGeom prst="rect">
+              <a:avLst/>
+            </a:prstGeom>
+          </p:spPr>
+        </p:pic>
+        <p:pic>
+          <p:nvPicPr>
+            <p:cNvPr id="14" name="Picture 13">
+              <a:extLst>
+                <a:ext uri="{FF2B5EF4-FFF2-40B4-BE49-F238E27FC236}">
+                  <a16:creationId xmlns:a16="http://schemas.microsoft.com/office/drawing/2014/main" id="{D07297ED-1EC8-03AE-B2E0-2AC63E0C2A3B}"/>
+                </a:ext>
+              </a:extLst>
+            </p:cNvPr>
+            <p:cNvPicPr>
+              <a:picLocks noChangeAspect="1"/>
+            </p:cNvPicPr>
+            <p:nvPr/>
+          </p:nvPicPr>
+          <p:blipFill rotWithShape="1">
+            <a:blip r:embed="rId2"/>
+            <a:srcRect l="31690" t="20203" r="59987" b="62122"/>
+            <a:stretch/>
+          </p:blipFill>
+          <p:spPr>
+            <a:xfrm>
+              <a:off x="34427028" y="15805496"/>
+              <a:ext cx="545387" cy="868726"/>
+            </a:xfrm>
+            <a:prstGeom prst="rect">
+              <a:avLst/>
+            </a:prstGeom>
+          </p:spPr>
+        </p:pic>
+        <p:pic>
+          <p:nvPicPr>
+            <p:cNvPr id="15" name="Picture 14">
+              <a:extLst>
+                <a:ext uri="{FF2B5EF4-FFF2-40B4-BE49-F238E27FC236}">
+                  <a16:creationId xmlns:a16="http://schemas.microsoft.com/office/drawing/2014/main" id="{9B0DDF68-990D-4B6E-237A-B6531DBECB9E}"/>
+                </a:ext>
+              </a:extLst>
+            </p:cNvPr>
+            <p:cNvPicPr>
+              <a:picLocks noChangeAspect="1"/>
+            </p:cNvPicPr>
+            <p:nvPr/>
+          </p:nvPicPr>
+          <p:blipFill rotWithShape="1">
+            <a:blip r:embed="rId2"/>
+            <a:srcRect l="40788" t="79683" r="49862" b="5240"/>
+            <a:stretch/>
+          </p:blipFill>
+          <p:spPr>
+            <a:xfrm>
+              <a:off x="30659805" y="15895985"/>
+              <a:ext cx="612742" cy="741018"/>
+            </a:xfrm>
+            <a:prstGeom prst="rect">
+              <a:avLst/>
+            </a:prstGeom>
+          </p:spPr>
+        </p:pic>
+        <p:pic>
+          <p:nvPicPr>
+            <p:cNvPr id="16" name="Picture 15">
+              <a:extLst>
+                <a:ext uri="{FF2B5EF4-FFF2-40B4-BE49-F238E27FC236}">
+                  <a16:creationId xmlns:a16="http://schemas.microsoft.com/office/drawing/2014/main" id="{9FF54971-8C99-E2D1-4024-8C04FE6C0DB1}"/>
+                </a:ext>
+              </a:extLst>
+            </p:cNvPr>
+            <p:cNvPicPr>
+              <a:picLocks noChangeAspect="1"/>
+            </p:cNvPicPr>
+            <p:nvPr/>
+          </p:nvPicPr>
+          <p:blipFill rotWithShape="1">
+            <a:blip r:embed="rId2"/>
+            <a:srcRect l="31286" t="2600" r="59670" b="80228"/>
+            <a:stretch/>
+          </p:blipFill>
+          <p:spPr>
+            <a:xfrm>
+              <a:off x="33137416" y="15874584"/>
+              <a:ext cx="592667" cy="844025"/>
+            </a:xfrm>
+            <a:prstGeom prst="rect">
+              <a:avLst/>
+            </a:prstGeom>
+          </p:spPr>
+        </p:pic>
+        <p:pic>
+          <p:nvPicPr>
+            <p:cNvPr id="17" name="Picture 16">
+              <a:extLst>
+                <a:ext uri="{FF2B5EF4-FFF2-40B4-BE49-F238E27FC236}">
+                  <a16:creationId xmlns:a16="http://schemas.microsoft.com/office/drawing/2014/main" id="{57375450-62EB-4206-DCD2-782B9B5099A8}"/>
+                </a:ext>
+              </a:extLst>
+            </p:cNvPr>
+            <p:cNvPicPr>
+              <a:picLocks noChangeAspect="1"/>
+            </p:cNvPicPr>
+            <p:nvPr/>
+          </p:nvPicPr>
+          <p:blipFill rotWithShape="1">
+            <a:blip r:embed="rId2"/>
+            <a:srcRect l="31563" t="60071" r="60116" b="22713"/>
+            <a:stretch/>
+          </p:blipFill>
+          <p:spPr>
+            <a:xfrm>
+              <a:off x="31313015" y="15872317"/>
+              <a:ext cx="545387" cy="846122"/>
+            </a:xfrm>
+            <a:prstGeom prst="rect">
+              <a:avLst/>
+            </a:prstGeom>
+          </p:spPr>
+        </p:pic>
+        <p:pic>
+          <p:nvPicPr>
+            <p:cNvPr id="18" name="Picture 17">
+              <a:extLst>
+                <a:ext uri="{FF2B5EF4-FFF2-40B4-BE49-F238E27FC236}">
+                  <a16:creationId xmlns:a16="http://schemas.microsoft.com/office/drawing/2014/main" id="{1B1CC1A1-F655-009D-26A0-A28F7B38236B}"/>
+                </a:ext>
+              </a:extLst>
+            </p:cNvPr>
+            <p:cNvPicPr>
+              <a:picLocks noChangeAspect="1"/>
+            </p:cNvPicPr>
+            <p:nvPr/>
+          </p:nvPicPr>
+          <p:blipFill rotWithShape="1">
+            <a:blip r:embed="rId3"/>
+            <a:srcRect l="11645" t="78233" r="79182" b="4877"/>
+            <a:stretch/>
+          </p:blipFill>
+          <p:spPr>
+            <a:xfrm>
+              <a:off x="31901007" y="15826519"/>
+              <a:ext cx="601134" cy="830109"/>
+            </a:xfrm>
+            <a:prstGeom prst="rect">
+              <a:avLst/>
+            </a:prstGeom>
+          </p:spPr>
+        </p:pic>
+        <p:pic>
+          <p:nvPicPr>
+            <p:cNvPr id="19" name="Picture 18">
+              <a:extLst>
+                <a:ext uri="{FF2B5EF4-FFF2-40B4-BE49-F238E27FC236}">
+                  <a16:creationId xmlns:a16="http://schemas.microsoft.com/office/drawing/2014/main" id="{2275C0D5-5706-1B67-A461-A7C50517F28F}"/>
+                </a:ext>
+              </a:extLst>
+            </p:cNvPr>
+            <p:cNvPicPr>
+              <a:picLocks noChangeAspect="1"/>
+            </p:cNvPicPr>
+            <p:nvPr/>
+          </p:nvPicPr>
+          <p:blipFill rotWithShape="1">
+            <a:blip r:embed="rId2"/>
+            <a:srcRect l="80078" t="40918" r="11094" b="43096"/>
+            <a:stretch/>
+          </p:blipFill>
+          <p:spPr>
+            <a:xfrm>
+              <a:off x="35020151" y="15883642"/>
+              <a:ext cx="578530" cy="785727"/>
+            </a:xfrm>
+            <a:prstGeom prst="rect">
+              <a:avLst/>
+            </a:prstGeom>
+          </p:spPr>
+        </p:pic>
+      </p:grpSp>
+      <p:sp>
+        <p:nvSpPr>
+          <p:cNvPr id="42" name="TextBox 41">
+            <a:extLst>
+              <a:ext uri="{FF2B5EF4-FFF2-40B4-BE49-F238E27FC236}">
+                <a16:creationId xmlns:a16="http://schemas.microsoft.com/office/drawing/2014/main" id="{37D48FEB-8291-5402-911E-2F4CCA4CD534}"/>
+              </a:ext>
+            </a:extLst>
+          </p:cNvPr>
+          <p:cNvSpPr txBox="1"/>
+          <p:nvPr/>
+        </p:nvSpPr>
+        <p:spPr>
+          <a:xfrm>
+            <a:off x="895516" y="4144028"/>
+            <a:ext cx="6096000" cy="307777"/>
+          </a:xfrm>
+          <a:prstGeom prst="rect">
+            <a:avLst/>
+          </a:prstGeom>
+          <a:noFill/>
+        </p:spPr>
+        <p:txBody>
+          <a:bodyPr wrap="square">
+            <a:spAutoFit/>
+          </a:bodyPr>
+          <a:lstStyle/>
+          <a:p>
+            <a:r>
+              <a:rPr lang="en-US" sz="1400" i="1" dirty="0">
                 <a:latin typeface="Avenir Book"/>
               </a:rPr>
-              <a:t>Gathering everyday with some great people and having lots of laughs.</a:t>
-            </a:r>
+              <a:t>10 Misclassified digits.</a:t>
+            </a:r>
+            <a:endParaRPr lang="en-US" sz="1400" dirty="0"/>
           </a:p>
         </p:txBody>
       </p:sp>
     </p:spTree>
     <p:extLst>
       <p:ext uri="{BB962C8B-B14F-4D97-AF65-F5344CB8AC3E}">
-        <p14:creationId xmlns:p14="http://schemas.microsoft.com/office/powerpoint/2010/main" val="2056229035"/>
+        <p14:creationId xmlns:p14="http://schemas.microsoft.com/office/powerpoint/2010/main" val="1428994067"/>
       </p:ext>
     </p:extLst>
   </p:cSld>
@@ -7634,6 +7063,430 @@
           <p:cNvPr id="2" name="Title 1">
             <a:extLst>
               <a:ext uri="{FF2B5EF4-FFF2-40B4-BE49-F238E27FC236}">
+                <a16:creationId xmlns:a16="http://schemas.microsoft.com/office/drawing/2014/main" id="{F2FBDD74-3537-0AF2-DDBC-80526B30EC8D}"/>
+              </a:ext>
+            </a:extLst>
+          </p:cNvPr>
+          <p:cNvSpPr>
+            <a:spLocks noGrp="1"/>
+          </p:cNvSpPr>
+          <p:nvPr>
+            <p:ph type="title"/>
+          </p:nvPr>
+        </p:nvSpPr>
+        <p:spPr/>
+        <p:txBody>
+          <a:bodyPr/>
+          <a:lstStyle/>
+          <a:p>
+            <a:r>
+              <a:rPr lang="en-US" dirty="0"/>
+              <a:t>Conclusion</a:t>
+            </a:r>
+          </a:p>
+        </p:txBody>
+      </p:sp>
+      <p:sp>
+        <p:nvSpPr>
+          <p:cNvPr id="4" name="TextBox 3">
+            <a:extLst>
+              <a:ext uri="{FF2B5EF4-FFF2-40B4-BE49-F238E27FC236}">
+                <a16:creationId xmlns:a16="http://schemas.microsoft.com/office/drawing/2014/main" id="{60DE80C0-2C22-4C25-E70B-C704DBC75763}"/>
+              </a:ext>
+            </a:extLst>
+          </p:cNvPr>
+          <p:cNvSpPr txBox="1"/>
+          <p:nvPr/>
+        </p:nvSpPr>
+        <p:spPr>
+          <a:xfrm>
+            <a:off x="575894" y="2369041"/>
+            <a:ext cx="11029616" cy="4104778"/>
+          </a:xfrm>
+          <a:prstGeom prst="rect">
+            <a:avLst/>
+          </a:prstGeom>
+          <a:noFill/>
+        </p:spPr>
+        <p:txBody>
+          <a:bodyPr wrap="square">
+            <a:spAutoFit/>
+          </a:bodyPr>
+          <a:lstStyle/>
+          <a:p>
+            <a:pPr marL="285750" indent="-285750">
+              <a:lnSpc>
+                <a:spcPct val="150000"/>
+              </a:lnSpc>
+              <a:spcBef>
+                <a:spcPct val="20000"/>
+              </a:spcBef>
+              <a:spcAft>
+                <a:spcPts val="800"/>
+              </a:spcAft>
+              <a:buClr>
+                <a:schemeClr val="accent2"/>
+              </a:buClr>
+              <a:buSzPct val="92000"/>
+              <a:buFont typeface="Wingdings 2" panose="05020102010507070707" pitchFamily="18" charset="2"/>
+              <a:buChar char=""/>
+            </a:pPr>
+            <a:r>
+              <a:rPr lang="en-US" sz="2000" dirty="0">
+                <a:latin typeface="Avenir Book"/>
+              </a:rPr>
+              <a:t>SVD and Linear Least Squares were able to successfully predict handwritten digits.</a:t>
+            </a:r>
+          </a:p>
+          <a:p>
+            <a:pPr marL="285750" indent="-285750">
+              <a:lnSpc>
+                <a:spcPct val="150000"/>
+              </a:lnSpc>
+              <a:spcBef>
+                <a:spcPct val="20000"/>
+              </a:spcBef>
+              <a:spcAft>
+                <a:spcPts val="800"/>
+              </a:spcAft>
+              <a:buClr>
+                <a:schemeClr val="accent2"/>
+              </a:buClr>
+              <a:buSzPct val="92000"/>
+              <a:buFont typeface="Wingdings 2" panose="05020102010507070707" pitchFamily="18" charset="2"/>
+              <a:buChar char=""/>
+            </a:pPr>
+            <a:r>
+              <a:rPr lang="en-US" sz="2000" dirty="0">
+                <a:latin typeface="Avenir Book"/>
+              </a:rPr>
+              <a:t>Achieved a high accuracy greater than 94%. </a:t>
+            </a:r>
+          </a:p>
+          <a:p>
+            <a:pPr marL="285750" indent="-285750">
+              <a:lnSpc>
+                <a:spcPct val="150000"/>
+              </a:lnSpc>
+              <a:spcBef>
+                <a:spcPct val="20000"/>
+              </a:spcBef>
+              <a:spcAft>
+                <a:spcPts val="800"/>
+              </a:spcAft>
+              <a:buClr>
+                <a:schemeClr val="accent2"/>
+              </a:buClr>
+              <a:buSzPct val="92000"/>
+              <a:buFont typeface="Wingdings 2" panose="05020102010507070707" pitchFamily="18" charset="2"/>
+              <a:buChar char=""/>
+            </a:pPr>
+            <a:r>
+              <a:rPr lang="en-US" sz="2000" dirty="0">
+                <a:latin typeface="Avenir Book"/>
+              </a:rPr>
+              <a:t>The model can be applied to a variety of applications:</a:t>
+            </a:r>
+          </a:p>
+          <a:p>
+            <a:pPr marL="742950" lvl="1" indent="-285750">
+              <a:lnSpc>
+                <a:spcPct val="150000"/>
+              </a:lnSpc>
+              <a:spcBef>
+                <a:spcPct val="20000"/>
+              </a:spcBef>
+              <a:spcAft>
+                <a:spcPts val="800"/>
+              </a:spcAft>
+              <a:buClr>
+                <a:schemeClr val="accent2"/>
+              </a:buClr>
+              <a:buSzPct val="92000"/>
+              <a:buFont typeface="Wingdings 2" panose="05020102010507070707" pitchFamily="18" charset="2"/>
+              <a:buChar char=""/>
+            </a:pPr>
+            <a:r>
+              <a:rPr lang="en-US" sz="2000" dirty="0">
+                <a:latin typeface="Avenir Book"/>
+              </a:rPr>
+              <a:t>Quickly interpreting postal codes and addresses on mail and packages.</a:t>
+            </a:r>
+          </a:p>
+          <a:p>
+            <a:pPr marL="742950" lvl="1" indent="-285750">
+              <a:lnSpc>
+                <a:spcPct val="150000"/>
+              </a:lnSpc>
+              <a:spcBef>
+                <a:spcPct val="20000"/>
+              </a:spcBef>
+              <a:spcAft>
+                <a:spcPts val="800"/>
+              </a:spcAft>
+              <a:buClr>
+                <a:schemeClr val="accent2"/>
+              </a:buClr>
+              <a:buSzPct val="92000"/>
+              <a:buFont typeface="Wingdings 2" panose="05020102010507070707" pitchFamily="18" charset="2"/>
+              <a:buChar char=""/>
+            </a:pPr>
+            <a:r>
+              <a:rPr lang="en-US" sz="2000" dirty="0">
+                <a:latin typeface="Avenir Book"/>
+              </a:rPr>
+              <a:t>Recognizing any handwritten digits, like financial documents, mathematical writing, etc.</a:t>
+            </a:r>
+          </a:p>
+          <a:p>
+            <a:pPr marL="742950" lvl="1" indent="-285750">
+              <a:lnSpc>
+                <a:spcPct val="150000"/>
+              </a:lnSpc>
+              <a:spcBef>
+                <a:spcPct val="20000"/>
+              </a:spcBef>
+              <a:spcAft>
+                <a:spcPts val="800"/>
+              </a:spcAft>
+              <a:buClr>
+                <a:schemeClr val="accent2"/>
+              </a:buClr>
+              <a:buSzPct val="92000"/>
+              <a:buFont typeface="Wingdings 2" panose="05020102010507070707" pitchFamily="18" charset="2"/>
+              <a:buChar char=""/>
+            </a:pPr>
+            <a:r>
+              <a:rPr lang="en-US" sz="2000" dirty="0">
+                <a:latin typeface="Avenir Book"/>
+              </a:rPr>
+              <a:t>Augmented to learn not only digits, but also the modern Latin alphabet, or any language’s alphabet.</a:t>
+            </a:r>
+          </a:p>
+        </p:txBody>
+      </p:sp>
+    </p:spTree>
+    <p:extLst>
+      <p:ext uri="{BB962C8B-B14F-4D97-AF65-F5344CB8AC3E}">
+        <p14:creationId xmlns:p14="http://schemas.microsoft.com/office/powerpoint/2010/main" val="492093351"/>
+      </p:ext>
+    </p:extLst>
+  </p:cSld>
+  <p:clrMapOvr>
+    <a:masterClrMapping/>
+  </p:clrMapOvr>
+</p:sld>
+</file>
+
+<file path=ppt/slides/slide17.xml><?xml version="1.0" encoding="utf-8"?>
+<p:sld xmlns:a="http://schemas.openxmlformats.org/drawingml/2006/main" xmlns:r="http://schemas.openxmlformats.org/officeDocument/2006/relationships" xmlns:p="http://schemas.openxmlformats.org/presentationml/2006/main">
+  <p:cSld>
+    <p:spTree>
+      <p:nvGrpSpPr>
+        <p:cNvPr id="1" name=""/>
+        <p:cNvGrpSpPr/>
+        <p:nvPr/>
+      </p:nvGrpSpPr>
+      <p:grpSpPr>
+        <a:xfrm>
+          <a:off x="0" y="0"/>
+          <a:ext cx="0" cy="0"/>
+          <a:chOff x="0" y="0"/>
+          <a:chExt cx="0" cy="0"/>
+        </a:xfrm>
+      </p:grpSpPr>
+      <p:sp>
+        <p:nvSpPr>
+          <p:cNvPr id="2" name="Title 1">
+            <a:extLst>
+              <a:ext uri="{FF2B5EF4-FFF2-40B4-BE49-F238E27FC236}">
+                <a16:creationId xmlns:a16="http://schemas.microsoft.com/office/drawing/2014/main" id="{34B8A9E2-4A95-6D3B-0B20-FA68D23F5B37}"/>
+              </a:ext>
+            </a:extLst>
+          </p:cNvPr>
+          <p:cNvSpPr>
+            <a:spLocks noGrp="1"/>
+          </p:cNvSpPr>
+          <p:nvPr>
+            <p:ph type="title"/>
+          </p:nvPr>
+        </p:nvSpPr>
+        <p:spPr/>
+        <p:txBody>
+          <a:bodyPr/>
+          <a:lstStyle/>
+          <a:p>
+            <a:r>
+              <a:rPr lang="en-US"/>
+              <a:t>Takeaways</a:t>
+            </a:r>
+          </a:p>
+        </p:txBody>
+      </p:sp>
+      <p:sp>
+        <p:nvSpPr>
+          <p:cNvPr id="15" name="TextBox 14">
+            <a:extLst>
+              <a:ext uri="{FF2B5EF4-FFF2-40B4-BE49-F238E27FC236}">
+                <a16:creationId xmlns:a16="http://schemas.microsoft.com/office/drawing/2014/main" id="{439713D9-B8A0-E5AC-46CC-DFDFEAEDC738}"/>
+              </a:ext>
+            </a:extLst>
+          </p:cNvPr>
+          <p:cNvSpPr txBox="1"/>
+          <p:nvPr/>
+        </p:nvSpPr>
+        <p:spPr>
+          <a:xfrm>
+            <a:off x="575895" y="2284281"/>
+            <a:ext cx="10701706" cy="2391489"/>
+          </a:xfrm>
+          <a:prstGeom prst="rect">
+            <a:avLst/>
+          </a:prstGeom>
+          <a:noFill/>
+        </p:spPr>
+        <p:txBody>
+          <a:bodyPr wrap="square" lIns="91440" tIns="45720" rIns="91440" bIns="45720" anchor="t">
+            <a:spAutoFit/>
+          </a:bodyPr>
+          <a:lstStyle/>
+          <a:p>
+            <a:pPr marL="285750" indent="-285750">
+              <a:lnSpc>
+                <a:spcPct val="150000"/>
+              </a:lnSpc>
+              <a:spcBef>
+                <a:spcPct val="20000"/>
+              </a:spcBef>
+              <a:spcAft>
+                <a:spcPts val="800"/>
+              </a:spcAft>
+              <a:buClr>
+                <a:schemeClr val="accent2"/>
+              </a:buClr>
+              <a:buSzPct val="92000"/>
+              <a:buFont typeface="Wingdings 2" panose="05020102010507070707" pitchFamily="18" charset="2"/>
+              <a:buChar char=""/>
+            </a:pPr>
+            <a:r>
+              <a:rPr lang="en-US" sz="2000" dirty="0">
+                <a:latin typeface="Avenir Book"/>
+              </a:rPr>
+              <a:t>Learning the applications of SVD and its ability to perform dimensionality reductions.</a:t>
+            </a:r>
+          </a:p>
+          <a:p>
+            <a:pPr marL="285750" indent="-285750">
+              <a:lnSpc>
+                <a:spcPct val="150000"/>
+              </a:lnSpc>
+              <a:spcBef>
+                <a:spcPct val="20000"/>
+              </a:spcBef>
+              <a:spcAft>
+                <a:spcPts val="800"/>
+              </a:spcAft>
+              <a:buClr>
+                <a:schemeClr val="accent2"/>
+              </a:buClr>
+              <a:buSzPct val="92000"/>
+              <a:buFont typeface="Wingdings 2" panose="05020102010507070707" pitchFamily="18" charset="2"/>
+              <a:buChar char=""/>
+            </a:pPr>
+            <a:r>
+              <a:rPr lang="en-US" sz="2000" dirty="0">
+                <a:latin typeface="Avenir Book"/>
+              </a:rPr>
+              <a:t>Understanding how to classify using Linear Least Squares.</a:t>
+            </a:r>
+          </a:p>
+          <a:p>
+            <a:pPr marL="285750" indent="-285750">
+              <a:lnSpc>
+                <a:spcPct val="150000"/>
+              </a:lnSpc>
+              <a:spcBef>
+                <a:spcPct val="20000"/>
+              </a:spcBef>
+              <a:spcAft>
+                <a:spcPts val="800"/>
+              </a:spcAft>
+              <a:buClr>
+                <a:schemeClr val="accent2"/>
+              </a:buClr>
+              <a:buSzPct val="92000"/>
+              <a:buFont typeface="Wingdings 2" panose="05020102010507070707" pitchFamily="18" charset="2"/>
+              <a:buChar char=""/>
+            </a:pPr>
+            <a:r>
+              <a:rPr lang="en-US" sz="2000" dirty="0">
+                <a:latin typeface="Avenir Book"/>
+              </a:rPr>
+              <a:t>Learning how to gather and analyze data and then present findings cohesively.</a:t>
+            </a:r>
+          </a:p>
+          <a:p>
+            <a:pPr marL="285750" indent="-285750">
+              <a:lnSpc>
+                <a:spcPct val="150000"/>
+              </a:lnSpc>
+              <a:spcBef>
+                <a:spcPct val="20000"/>
+              </a:spcBef>
+              <a:spcAft>
+                <a:spcPts val="800"/>
+              </a:spcAft>
+              <a:buClr>
+                <a:schemeClr val="accent2"/>
+              </a:buClr>
+              <a:buSzPct val="92000"/>
+              <a:buFont typeface="Wingdings 2" panose="05020102010507070707" pitchFamily="18" charset="2"/>
+              <a:buChar char=""/>
+            </a:pPr>
+            <a:r>
+              <a:rPr lang="en-US" sz="2000" dirty="0">
+                <a:latin typeface="Avenir Book"/>
+              </a:rPr>
+              <a:t>Gathering everyday with great people and having lots of laughs.</a:t>
+            </a:r>
+          </a:p>
+        </p:txBody>
+      </p:sp>
+    </p:spTree>
+    <p:extLst>
+      <p:ext uri="{BB962C8B-B14F-4D97-AF65-F5344CB8AC3E}">
+        <p14:creationId xmlns:p14="http://schemas.microsoft.com/office/powerpoint/2010/main" val="2056229035"/>
+      </p:ext>
+    </p:extLst>
+  </p:cSld>
+  <p:clrMapOvr>
+    <a:masterClrMapping/>
+  </p:clrMapOvr>
+</p:sld>
+</file>
+
+<file path=ppt/slides/slide18.xml><?xml version="1.0" encoding="utf-8"?>
+<p:sld xmlns:a="http://schemas.openxmlformats.org/drawingml/2006/main" xmlns:r="http://schemas.openxmlformats.org/officeDocument/2006/relationships" xmlns:p="http://schemas.openxmlformats.org/presentationml/2006/main">
+  <p:cSld>
+    <p:spTree>
+      <p:nvGrpSpPr>
+        <p:cNvPr id="1" name=""/>
+        <p:cNvGrpSpPr/>
+        <p:nvPr/>
+      </p:nvGrpSpPr>
+      <p:grpSpPr>
+        <a:xfrm>
+          <a:off x="0" y="0"/>
+          <a:ext cx="0" cy="0"/>
+          <a:chOff x="0" y="0"/>
+          <a:chExt cx="0" cy="0"/>
+        </a:xfrm>
+      </p:grpSpPr>
+      <p:sp>
+        <p:nvSpPr>
+          <p:cNvPr id="2" name="Title 1">
+            <a:extLst>
+              <a:ext uri="{FF2B5EF4-FFF2-40B4-BE49-F238E27FC236}">
                 <a16:creationId xmlns:a16="http://schemas.microsoft.com/office/drawing/2014/main" id="{D9D3F243-5C45-3723-3504-CCAAE3D96F96}"/>
               </a:ext>
             </a:extLst>
@@ -7654,7 +7507,7 @@
           <a:p>
             <a:pPr algn="ctr"/>
             <a:r>
-              <a:rPr lang="en-US" sz="7200"/>
+              <a:rPr lang="en-US" sz="7200" dirty="0"/>
               <a:t>Thank you!</a:t>
             </a:r>
           </a:p>
@@ -7674,8 +7527,8 @@
         </p:nvSpPr>
         <p:spPr>
           <a:xfrm>
-            <a:off x="1603274" y="3529245"/>
-            <a:ext cx="8949381" cy="2308324"/>
+            <a:off x="2438407" y="3458584"/>
+            <a:ext cx="7315185" cy="2378985"/>
           </a:xfrm>
           <a:prstGeom prst="rect">
             <a:avLst/>
@@ -7688,9 +7541,13 @@
           </a:bodyPr>
           <a:lstStyle/>
           <a:p>
-            <a:pPr algn="ctr"/>
-            <a:r>
-              <a:rPr lang="en-US" sz="4800">
+            <a:pPr algn="ctr">
+              <a:lnSpc>
+                <a:spcPct val="150000"/>
+              </a:lnSpc>
+            </a:pPr>
+            <a:r>
+              <a:rPr lang="en-US" sz="3400" dirty="0">
                 <a:solidFill>
                   <a:schemeClr val="bg1"/>
                 </a:solidFill>
@@ -7699,7 +7556,7 @@
               <a:t>We would like to extend our gratitude to Frederic </a:t>
             </a:r>
             <a:r>
-              <a:rPr lang="en-US" sz="4800" err="1">
+              <a:rPr lang="en-US" sz="3400" dirty="0" err="1">
                 <a:solidFill>
                   <a:schemeClr val="bg1"/>
                 </a:solidFill>
@@ -7708,7 +7565,7 @@
               <a:t>Marazzato</a:t>
             </a:r>
             <a:r>
-              <a:rPr lang="en-US" sz="4800">
+              <a:rPr lang="en-US" sz="3400" dirty="0">
                 <a:solidFill>
                   <a:schemeClr val="bg1"/>
                 </a:solidFill>
@@ -8122,7 +7979,7 @@
           <a:lstStyle/>
           <a:p>
             <a:r>
-              <a:rPr lang="en-US" sz="3200">
+              <a:rPr lang="en-US" dirty="0">
                 <a:solidFill>
                   <a:srgbClr val="FFFFFF"/>
                 </a:solidFill>
@@ -8146,8 +8003,8 @@
         </p:nvSpPr>
         <p:spPr>
           <a:xfrm>
-            <a:off x="5155905" y="1113764"/>
-            <a:ext cx="6589562" cy="4624327"/>
+            <a:off x="5133881" y="677369"/>
+            <a:ext cx="6589562" cy="5566224"/>
           </a:xfrm>
           <a:prstGeom prst="rect">
             <a:avLst/>
@@ -8160,6 +8017,9 @@
           <a:lstStyle/>
           <a:p>
             <a:pPr marL="285750" indent="-285750">
+              <a:lnSpc>
+                <a:spcPct val="150000"/>
+              </a:lnSpc>
               <a:spcBef>
                 <a:spcPct val="20000"/>
               </a:spcBef>
@@ -8174,14 +8034,17 @@
               <a:buChar char=""/>
             </a:pPr>
             <a:r>
-              <a:rPr lang="en-US" sz="2200">
+              <a:rPr lang="en-US" sz="2000" dirty="0">
                 <a:latin typeface="Avenir Book" panose="02000503020000020003" pitchFamily="2" charset="0"/>
               </a:rPr>
-              <a:t>We wanted to incorporate machine learning into a tangible project, so the case of recognizing handwritten digits was appealing.</a:t>
+              <a:t>Use machine learning to recognize handwritten digits.</a:t>
             </a:r>
           </a:p>
           <a:p>
             <a:pPr marL="285750" indent="-285750">
+              <a:lnSpc>
+                <a:spcPct val="150000"/>
+              </a:lnSpc>
               <a:spcBef>
                 <a:spcPct val="20000"/>
               </a:spcBef>
@@ -8196,14 +8059,17 @@
               <a:buChar char=""/>
             </a:pPr>
             <a:r>
-              <a:rPr lang="en-US" sz="2200">
+              <a:rPr lang="en-US" sz="2000" dirty="0">
                 <a:latin typeface="Avenir Book" panose="02000503020000020003" pitchFamily="2" charset="0"/>
               </a:rPr>
-              <a:t>Using handwritten digits from the United States Postal Service, we plan to use SVD to train our model to learn to read the digits 0-9.</a:t>
+              <a:t>Use SVD to train the model to learn digits 0-9 and reduce the dimensionality.</a:t>
             </a:r>
           </a:p>
           <a:p>
             <a:pPr marL="285750" indent="-285750">
+              <a:lnSpc>
+                <a:spcPct val="150000"/>
+              </a:lnSpc>
               <a:spcBef>
                 <a:spcPct val="20000"/>
               </a:spcBef>
@@ -8218,14 +8084,17 @@
               <a:buChar char=""/>
             </a:pPr>
             <a:r>
-              <a:rPr lang="en-US" sz="2200">
+              <a:rPr lang="en-US" sz="2000" dirty="0">
                 <a:latin typeface="Avenir Book" panose="02000503020000020003" pitchFamily="2" charset="0"/>
               </a:rPr>
-              <a:t>Our goal is to test our model's accuracy on a new data sample containing unseen images of written digits, and we seek to maximize this accuracy.</a:t>
+              <a:t>Use Linear Least Squares to classify the images.</a:t>
             </a:r>
           </a:p>
           <a:p>
             <a:pPr marL="285750" indent="-285750">
+              <a:lnSpc>
+                <a:spcPct val="150000"/>
+              </a:lnSpc>
               <a:spcBef>
                 <a:spcPct val="20000"/>
               </a:spcBef>
@@ -8240,10 +8109,60 @@
               <a:buChar char=""/>
             </a:pPr>
             <a:r>
-              <a:rPr lang="en-US" sz="2200">
+              <a:rPr lang="en-US" sz="2000" dirty="0">
                 <a:latin typeface="Avenir Book" panose="02000503020000020003" pitchFamily="2" charset="0"/>
               </a:rPr>
-              <a:t>We decided to simplify our data via Singular Value Decomposition (SVD) over Principal Component Analysis (PCA), because SVD is more efficient than PCA when working with dense data.</a:t>
+              <a:t>Test the model's accuracy on a new data sample containing unseen images of digits.</a:t>
+            </a:r>
+          </a:p>
+          <a:p>
+            <a:pPr marL="285750" indent="-285750">
+              <a:lnSpc>
+                <a:spcPct val="150000"/>
+              </a:lnSpc>
+              <a:spcBef>
+                <a:spcPct val="20000"/>
+              </a:spcBef>
+              <a:spcAft>
+                <a:spcPts val="800"/>
+              </a:spcAft>
+              <a:buClr>
+                <a:schemeClr val="accent2"/>
+              </a:buClr>
+              <a:buSzPct val="92000"/>
+              <a:buFont typeface="Wingdings 2" panose="05020102010507070707" pitchFamily="18" charset="2"/>
+              <a:buChar char=""/>
+            </a:pPr>
+            <a:r>
+              <a:rPr lang="en-US" sz="2000" dirty="0">
+                <a:latin typeface="Avenir Book" panose="02000503020000020003" pitchFamily="2" charset="0"/>
+              </a:rPr>
+              <a:t>Find the optimal rank (the one that generates the highest accuracy).</a:t>
+            </a:r>
+          </a:p>
+          <a:p>
+            <a:pPr marL="285750" indent="-285750">
+              <a:lnSpc>
+                <a:spcPct val="150000"/>
+              </a:lnSpc>
+              <a:spcBef>
+                <a:spcPct val="20000"/>
+              </a:spcBef>
+              <a:spcAft>
+                <a:spcPts val="800"/>
+              </a:spcAft>
+              <a:buClr>
+                <a:schemeClr val="accent2"/>
+              </a:buClr>
+              <a:buSzPct val="92000"/>
+              <a:buFont typeface="Wingdings 2" panose="05020102010507070707" pitchFamily="18" charset="2"/>
+              <a:buChar char=""/>
+            </a:pPr>
+            <a:r>
+              <a:rPr lang="en-US" sz="2000" dirty="0">
+                <a:latin typeface="Avenir Book" panose="02000503020000020003" pitchFamily="2" charset="0"/>
+              </a:rPr>
+              <a:t>We used SVD over PCA because it is more efficient when working with dense data.</a:t>
             </a:r>
           </a:p>
         </p:txBody>
@@ -8300,7 +8219,7 @@
           <a:lstStyle/>
           <a:p>
             <a:r>
-              <a:rPr lang="en-US"/>
+              <a:rPr lang="en-US" dirty="0"/>
               <a:t>Data Set</a:t>
             </a:r>
           </a:p>
@@ -8320,10 +8239,10 @@
         </p:nvGrpSpPr>
         <p:grpSpPr>
           <a:xfrm>
-            <a:off x="1061070" y="4745470"/>
-            <a:ext cx="10062475" cy="1346102"/>
+            <a:off x="1059464" y="5301534"/>
+            <a:ext cx="10062475" cy="1253769"/>
             <a:chOff x="1486610" y="20202581"/>
-            <a:chExt cx="12912612" cy="1727378"/>
+            <a:chExt cx="12912612" cy="1608892"/>
           </a:xfrm>
         </p:grpSpPr>
         <p:pic>
@@ -8370,7 +8289,7 @@
           <p:spPr>
             <a:xfrm>
               <a:off x="1841788" y="21416520"/>
-              <a:ext cx="9169740" cy="513439"/>
+              <a:ext cx="9169740" cy="394953"/>
             </a:xfrm>
             <a:prstGeom prst="rect">
               <a:avLst/>
@@ -8384,22 +8303,22 @@
             <a:lstStyle/>
             <a:p>
               <a:r>
-                <a:rPr lang="en-US" sz="2000" i="1">
+                <a:rPr lang="en-US" sz="1400" i="1" dirty="0">
                   <a:latin typeface="Avenir Book"/>
                 </a:rPr>
                 <a:t>Original image samples of each digit from dataset.</a:t>
               </a:r>
-              <a:endParaRPr lang="en-US"/>
+              <a:endParaRPr lang="en-US" sz="1400" dirty="0"/>
             </a:p>
           </p:txBody>
         </p:sp>
       </p:grpSp>
       <p:sp>
         <p:nvSpPr>
-          <p:cNvPr id="10" name="TextBox 9">
+          <p:cNvPr id="9" name="TextBox 8">
             <a:extLst>
               <a:ext uri="{FF2B5EF4-FFF2-40B4-BE49-F238E27FC236}">
-                <a16:creationId xmlns:a16="http://schemas.microsoft.com/office/drawing/2014/main" id="{EF716726-D7DC-D4FB-60E4-72258BB840D2}"/>
+                <a16:creationId xmlns:a16="http://schemas.microsoft.com/office/drawing/2014/main" id="{2DCF78B8-EA90-6FA7-EECF-BFE9925C6AF3}"/>
               </a:ext>
             </a:extLst>
           </p:cNvPr>
@@ -8408,8 +8327,8 @@
         </p:nvSpPr>
         <p:spPr>
           <a:xfrm>
-            <a:off x="530299" y="2274838"/>
-            <a:ext cx="11120806" cy="1785104"/>
+            <a:off x="575894" y="2201184"/>
+            <a:ext cx="9122375" cy="3643113"/>
           </a:xfrm>
           <a:prstGeom prst="rect">
             <a:avLst/>
@@ -8423,29 +8342,80 @@
           <a:lstStyle/>
           <a:p>
             <a:pPr marL="285750" indent="-285750">
-              <a:buFont typeface="Arial" panose="020B0604020202020204" pitchFamily="34" charset="0"/>
-              <a:buChar char="•"/>
+              <a:lnSpc>
+                <a:spcPct val="150000"/>
+              </a:lnSpc>
+              <a:spcBef>
+                <a:spcPct val="20000"/>
+              </a:spcBef>
+              <a:spcAft>
+                <a:spcPts val="800"/>
+              </a:spcAft>
+              <a:buClr>
+                <a:schemeClr val="accent2"/>
+              </a:buClr>
+              <a:buSzPct val="92000"/>
+              <a:buFont typeface="Wingdings 2" panose="05020102010507070707" pitchFamily="18" charset="2"/>
+              <a:buChar char=""/>
             </a:pPr>
             <a:r>
-              <a:rPr lang="en-US" sz="2200">
+              <a:rPr lang="en-US" sz="2000" dirty="0">
+                <a:latin typeface="Avenir Book" panose="02000503020000020003" pitchFamily="2" charset="0"/>
+              </a:rPr>
+              <a:t>Handwritten digit images come from USPS.</a:t>
+            </a:r>
+          </a:p>
+          <a:p>
+            <a:pPr marL="285750" indent="-285750">
+              <a:lnSpc>
+                <a:spcPct val="150000"/>
+              </a:lnSpc>
+              <a:spcBef>
+                <a:spcPct val="20000"/>
+              </a:spcBef>
+              <a:spcAft>
+                <a:spcPts val="800"/>
+              </a:spcAft>
+              <a:buClr>
+                <a:schemeClr val="accent2"/>
+              </a:buClr>
+              <a:buSzPct val="92000"/>
+              <a:buFont typeface="Wingdings 2" panose="05020102010507070707" pitchFamily="18" charset="2"/>
+              <a:buChar char=""/>
+            </a:pPr>
+            <a:r>
+              <a:rPr lang="en-US" sz="2000" dirty="0">
                 <a:latin typeface="Avenir Book"/>
               </a:rPr>
-              <a:t>Our dataset comes from the USPS.</a:t>
-            </a:r>
-            <a:r>
-              <a:rPr lang="en-US" sz="2200" b="1" baseline="30000">
+              <a:t>7291 training and 2007 testing images in h5 format.</a:t>
+            </a:r>
+          </a:p>
+          <a:p>
+            <a:pPr marL="285750" indent="-285750">
+              <a:lnSpc>
+                <a:spcPct val="150000"/>
+              </a:lnSpc>
+              <a:spcBef>
+                <a:spcPct val="20000"/>
+              </a:spcBef>
+              <a:spcAft>
+                <a:spcPts val="800"/>
+              </a:spcAft>
+              <a:buClr>
+                <a:schemeClr val="accent2"/>
+              </a:buClr>
+              <a:buSzPct val="92000"/>
+              <a:buFont typeface="Wingdings 2" panose="05020102010507070707" pitchFamily="18" charset="2"/>
+              <a:buChar char=""/>
+            </a:pPr>
+            <a:r>
+              <a:rPr lang="en-US" sz="2000" dirty="0">
                 <a:latin typeface="Avenir Book"/>
               </a:rPr>
-              <a:t>1</a:t>
-            </a:r>
-            <a:r>
-              <a:rPr lang="en-US" sz="2200">
-                <a:latin typeface="Avenir Book"/>
-              </a:rPr>
-              <a:t> The dataset contains 7291 training and 2007 test images in h5 format, represented as 16 by 16 matrices of 8-bit </a:t>
-            </a:r>
-            <a:r>
-              <a:rPr lang="en-US" sz="2200">
+              <a:t>Images are 16x16 matrices of 8-bit </a:t>
+            </a:r>
+            <a:r>
+              <a:rPr lang="en-US" sz="2000" dirty="0">
                 <a:latin typeface="Avenir Book" panose="02000503020000020003" pitchFamily="2" charset="0"/>
                 <a:ea typeface="+mn-lt"/>
                 <a:cs typeface="+mn-lt"/>
@@ -8453,32 +8423,86 @@
               <a:t>(0-255) </a:t>
             </a:r>
             <a:r>
-              <a:rPr lang="en-US" sz="2200">
+              <a:rPr lang="en-US" sz="2000" dirty="0">
                 <a:latin typeface="Avenir Book"/>
               </a:rPr>
-              <a:t>grayscale values. </a:t>
+              <a:t>grayscale values.</a:t>
             </a:r>
           </a:p>
           <a:p>
             <a:pPr marL="285750" indent="-285750">
-              <a:buFont typeface="Arial" panose="020B0604020202020204" pitchFamily="34" charset="0"/>
-              <a:buChar char="•"/>
+              <a:lnSpc>
+                <a:spcPct val="150000"/>
+              </a:lnSpc>
+              <a:spcBef>
+                <a:spcPct val="20000"/>
+              </a:spcBef>
+              <a:spcAft>
+                <a:spcPts val="800"/>
+              </a:spcAft>
+              <a:buClr>
+                <a:schemeClr val="accent2"/>
+              </a:buClr>
+              <a:buSzPct val="92000"/>
+              <a:buFont typeface="Wingdings 2" panose="05020102010507070707" pitchFamily="18" charset="2"/>
+              <a:buChar char=""/>
             </a:pPr>
-            <a:endParaRPr lang="en-US" sz="2200">
-              <a:latin typeface="Avenir Book"/>
-            </a:endParaRPr>
-          </a:p>
-          <a:p>
-            <a:pPr marL="285750" indent="-285750">
-              <a:buFont typeface="Arial" panose="020B0604020202020204" pitchFamily="34" charset="0"/>
-              <a:buChar char="•"/>
-            </a:pPr>
-            <a:r>
-              <a:rPr lang="en-US" sz="2200">
+            <a:r>
+              <a:rPr lang="en-US" sz="2000" dirty="0">
                 <a:latin typeface="Avenir Book"/>
               </a:rPr>
-              <a:t>Our training set represents approximately 80 percent of the data, and the testing set is around 20 percent.</a:t>
-            </a:r>
+              <a:t>Training set is 80% of data set.</a:t>
+            </a:r>
+          </a:p>
+          <a:p>
+            <a:pPr marL="285750" indent="-285750">
+              <a:lnSpc>
+                <a:spcPct val="150000"/>
+              </a:lnSpc>
+              <a:spcBef>
+                <a:spcPct val="20000"/>
+              </a:spcBef>
+              <a:spcAft>
+                <a:spcPts val="800"/>
+              </a:spcAft>
+              <a:buClr>
+                <a:schemeClr val="accent2"/>
+              </a:buClr>
+              <a:buSzPct val="92000"/>
+              <a:buFont typeface="Wingdings 2" panose="05020102010507070707" pitchFamily="18" charset="2"/>
+              <a:buChar char=""/>
+            </a:pPr>
+            <a:r>
+              <a:rPr lang="en-US" sz="2000" dirty="0">
+                <a:latin typeface="Avenir Book"/>
+              </a:rPr>
+              <a:t>Testing set is 20% of data set.  </a:t>
+            </a:r>
+            <a:endParaRPr lang="en-US" sz="2000" dirty="0">
+              <a:latin typeface="Avenir Book" panose="02000503020000020003" pitchFamily="2" charset="0"/>
+            </a:endParaRPr>
+          </a:p>
+          <a:p>
+            <a:pPr marL="285750" indent="-285750">
+              <a:lnSpc>
+                <a:spcPct val="150000"/>
+              </a:lnSpc>
+              <a:spcBef>
+                <a:spcPct val="20000"/>
+              </a:spcBef>
+              <a:spcAft>
+                <a:spcPts val="800"/>
+              </a:spcAft>
+              <a:buClr>
+                <a:schemeClr val="accent2"/>
+              </a:buClr>
+              <a:buSzPct val="92000"/>
+              <a:buFont typeface="Wingdings 2" panose="05020102010507070707" pitchFamily="18" charset="2"/>
+              <a:buChar char=""/>
+            </a:pPr>
+            <a:endParaRPr lang="en-US" sz="2000" dirty="0">
+              <a:latin typeface="Avenir Book" panose="02000503020000020003" pitchFamily="2" charset="0"/>
+            </a:endParaRPr>
           </a:p>
         </p:txBody>
       </p:sp>
@@ -8571,7 +8595,7 @@
         </p:blipFill>
         <p:spPr>
           <a:xfrm>
-            <a:off x="1411975" y="1084029"/>
+            <a:off x="1411975" y="1107922"/>
             <a:ext cx="4919470" cy="4706538"/>
           </a:xfrm>
           <a:prstGeom prst="rect">
@@ -8600,7 +8624,7 @@
         </p:blipFill>
         <p:spPr>
           <a:xfrm>
-            <a:off x="6324602" y="1057272"/>
+            <a:off x="6324602" y="1081165"/>
             <a:ext cx="4953815" cy="4695670"/>
           </a:xfrm>
           <a:prstGeom prst="rect">
@@ -8622,8 +8646,8 @@
         </p:nvSpPr>
         <p:spPr>
           <a:xfrm>
-            <a:off x="2405146" y="5817324"/>
-            <a:ext cx="7381708" cy="400110"/>
+            <a:off x="2059157" y="5771263"/>
+            <a:ext cx="7381708" cy="307777"/>
           </a:xfrm>
           <a:prstGeom prst="rect">
             <a:avLst/>
@@ -8637,7 +8661,7 @@
           <a:lstStyle/>
           <a:p>
             <a:r>
-              <a:rPr lang="en-US" sz="2000" i="1">
+              <a:rPr lang="en-US" sz="1400" i="1" dirty="0">
                 <a:latin typeface="Avenir Book" panose="02000503020000020003" pitchFamily="2" charset="0"/>
               </a:rPr>
               <a:t>Digit distribution for training and testing dataset, respectively.</a:t>
@@ -8697,7 +8721,7 @@
           <a:lstStyle/>
           <a:p>
             <a:r>
-              <a:rPr lang="en-US"/>
+              <a:rPr lang="en-US" dirty="0"/>
               <a:t>Splitting the data</a:t>
             </a:r>
           </a:p>
@@ -8718,7 +8742,7 @@
         <p:spPr>
           <a:xfrm>
             <a:off x="530299" y="2274838"/>
-            <a:ext cx="11120806" cy="3139321"/>
+            <a:ext cx="11120806" cy="2391489"/>
           </a:xfrm>
           <a:prstGeom prst="rect">
             <a:avLst/>
@@ -8732,32 +8756,49 @@
           <a:lstStyle/>
           <a:p>
             <a:pPr marL="285750" indent="-285750">
-              <a:buFont typeface="Arial" panose="020B0604020202020204" pitchFamily="34" charset="0"/>
-              <a:buChar char="•"/>
+              <a:lnSpc>
+                <a:spcPct val="150000"/>
+              </a:lnSpc>
+              <a:spcBef>
+                <a:spcPct val="20000"/>
+              </a:spcBef>
+              <a:spcAft>
+                <a:spcPts val="800"/>
+              </a:spcAft>
+              <a:buClr>
+                <a:schemeClr val="accent2"/>
+              </a:buClr>
+              <a:buSzPct val="92000"/>
+              <a:buFont typeface="Wingdings 2" panose="05020102010507070707" pitchFamily="18" charset="2"/>
+              <a:buChar char=""/>
             </a:pPr>
             <a:r>
-              <a:rPr lang="en-US" sz="2200">
+              <a:rPr lang="en-US" sz="2000" dirty="0">
                 <a:latin typeface="Avenir Book"/>
               </a:rPr>
-              <a:t>We used a Python dictionary to store all matrixes for each digit in the form (digit, matrices).</a:t>
+              <a:t>Used a Python dictionary to store all matrixes for each digit.</a:t>
             </a:r>
           </a:p>
           <a:p>
             <a:pPr marL="285750" indent="-285750">
-              <a:buFont typeface="Arial" panose="020B0604020202020204" pitchFamily="34" charset="0"/>
-              <a:buChar char="•"/>
+              <a:lnSpc>
+                <a:spcPct val="150000"/>
+              </a:lnSpc>
+              <a:spcBef>
+                <a:spcPct val="20000"/>
+              </a:spcBef>
+              <a:spcAft>
+                <a:spcPts val="800"/>
+              </a:spcAft>
+              <a:buClr>
+                <a:schemeClr val="accent2"/>
+              </a:buClr>
+              <a:buSzPct val="92000"/>
+              <a:buFont typeface="Wingdings 2" panose="05020102010507070707" pitchFamily="18" charset="2"/>
+              <a:buChar char=""/>
             </a:pPr>
-            <a:endParaRPr lang="en-US" sz="2200">
-              <a:latin typeface="Avenir Book"/>
-            </a:endParaRPr>
-          </a:p>
-          <a:p>
-            <a:pPr marL="285750" indent="-285750">
-              <a:buFont typeface="Arial" panose="020B0604020202020204" pitchFamily="34" charset="0"/>
-              <a:buChar char="•"/>
-            </a:pPr>
-            <a:r>
-              <a:rPr lang="en-US" sz="2200">
+            <a:r>
+              <a:rPr lang="en-US" sz="2000" dirty="0">
                 <a:latin typeface="Avenir Book"/>
               </a:rPr>
               <a:t>The 16x16 matrices were flattened into 256x1.</a:t>
@@ -8765,50 +8806,53 @@
           </a:p>
           <a:p>
             <a:pPr marL="285750" indent="-285750">
-              <a:buFont typeface="Arial" panose="020B0604020202020204" pitchFamily="34" charset="0"/>
-              <a:buChar char="•"/>
+              <a:lnSpc>
+                <a:spcPct val="150000"/>
+              </a:lnSpc>
+              <a:spcBef>
+                <a:spcPct val="20000"/>
+              </a:spcBef>
+              <a:spcAft>
+                <a:spcPts val="800"/>
+              </a:spcAft>
+              <a:buClr>
+                <a:schemeClr val="accent2"/>
+              </a:buClr>
+              <a:buSzPct val="92000"/>
+              <a:buFont typeface="Wingdings 2" panose="05020102010507070707" pitchFamily="18" charset="2"/>
+              <a:buChar char=""/>
             </a:pPr>
-            <a:endParaRPr lang="en-US" sz="2200">
-              <a:latin typeface="Avenir Book"/>
-            </a:endParaRPr>
-          </a:p>
-          <a:p>
-            <a:pPr marL="285750" indent="-285750">
-              <a:buFont typeface="Arial" panose="020B0604020202020204" pitchFamily="34" charset="0"/>
-              <a:buChar char="•"/>
-            </a:pPr>
-            <a:r>
-              <a:rPr lang="en-US" sz="2200">
+            <a:r>
+              <a:rPr lang="en-US" sz="2000" dirty="0">
                 <a:latin typeface="Avenir Book"/>
               </a:rPr>
               <a:t>All the matrices associated with each digit were stacked together in the dictionary.</a:t>
             </a:r>
           </a:p>
           <a:p>
-            <a:endParaRPr lang="en-US" sz="2200">
-              <a:latin typeface="Avenir Book"/>
-            </a:endParaRPr>
-          </a:p>
-          <a:p>
             <a:pPr marL="285750" indent="-285750">
-              <a:buFont typeface="Arial" panose="020B0604020202020204" pitchFamily="34" charset="0"/>
-              <a:buChar char="•"/>
+              <a:lnSpc>
+                <a:spcPct val="150000"/>
+              </a:lnSpc>
+              <a:spcBef>
+                <a:spcPct val="20000"/>
+              </a:spcBef>
+              <a:spcAft>
+                <a:spcPts val="800"/>
+              </a:spcAft>
+              <a:buClr>
+                <a:schemeClr val="accent2"/>
+              </a:buClr>
+              <a:buSzPct val="92000"/>
+              <a:buFont typeface="Wingdings 2" panose="05020102010507070707" pitchFamily="18" charset="2"/>
+              <a:buChar char=""/>
             </a:pPr>
             <a:r>
-              <a:rPr lang="en-US" sz="2200">
+              <a:rPr lang="en-US" sz="2000" dirty="0">
                 <a:latin typeface="Avenir Book"/>
               </a:rPr>
               <a:t>For example, digit 0, with 1194 samples, has a shape of (1194, 256) in the dictionary.</a:t>
             </a:r>
-          </a:p>
-          <a:p>
-            <a:pPr marL="285750" indent="-285750">
-              <a:buFont typeface="Arial" panose="020B0604020202020204" pitchFamily="34" charset="0"/>
-              <a:buChar char="•"/>
-            </a:pPr>
-            <a:endParaRPr lang="en-US" sz="2200">
-              <a:latin typeface="Avenir Book"/>
-            </a:endParaRPr>
           </a:p>
         </p:txBody>
       </p:sp>
@@ -8834,7 +8878,7 @@
         </p:blipFill>
         <p:spPr>
           <a:xfrm>
-            <a:off x="1645553" y="5438658"/>
+            <a:off x="1645553" y="5216232"/>
             <a:ext cx="8851900" cy="304800"/>
           </a:xfrm>
           <a:prstGeom prst="rect">
@@ -8864,7 +8908,7 @@
         </p:blipFill>
         <p:spPr>
           <a:xfrm>
-            <a:off x="1645553" y="5919005"/>
+            <a:off x="1645553" y="5696579"/>
             <a:ext cx="8890000" cy="317500"/>
           </a:xfrm>
           <a:prstGeom prst="rect">
@@ -8924,14 +8968,14 @@
           <a:lstStyle/>
           <a:p>
             <a:r>
-              <a:rPr lang="en-US"/>
-              <a:t>Methods – Singular Value Decomposition</a:t>
-            </a:r>
-          </a:p>
-        </p:txBody>
-      </p:sp>
-      <mc:AlternateContent xmlns:mc="http://schemas.openxmlformats.org/markup-compatibility/2006">
-        <mc:Choice xmlns:a14="http://schemas.microsoft.com/office/drawing/2010/main" Requires="a14">
+              <a:rPr lang="en-US" dirty="0"/>
+              <a:t>Singular Value Decomposition</a:t>
+            </a:r>
+          </a:p>
+        </p:txBody>
+      </p:sp>
+      <mc:AlternateContent xmlns:mc="http://schemas.openxmlformats.org/markup-compatibility/2006" xmlns:a14="http://schemas.microsoft.com/office/drawing/2010/main">
+        <mc:Choice Requires="a14">
           <p:sp>
             <p:nvSpPr>
               <p:cNvPr id="4" name="TextBox 3">
@@ -8947,7 +8991,7 @@
             <p:spPr>
               <a:xfrm>
                 <a:off x="575894" y="2205533"/>
-                <a:ext cx="11243574" cy="3077766"/>
+                <a:ext cx="11243574" cy="3555910"/>
               </a:xfrm>
               <a:prstGeom prst="rect">
                 <a:avLst/>
@@ -8960,73 +9004,222 @@
               </a:bodyPr>
               <a:lstStyle/>
               <a:p>
-                <a:pPr marL="342900" indent="-342900">
-                  <a:buFont typeface="Arial" panose="020B0604020202020204" pitchFamily="34" charset="0"/>
-                  <a:buChar char="•"/>
+                <a:pPr marL="285750" indent="-285750">
+                  <a:lnSpc>
+                    <a:spcPct val="150000"/>
+                  </a:lnSpc>
+                  <a:spcBef>
+                    <a:spcPct val="20000"/>
+                  </a:spcBef>
+                  <a:spcAft>
+                    <a:spcPts val="800"/>
+                  </a:spcAft>
+                  <a:buClr>
+                    <a:schemeClr val="accent2"/>
+                  </a:buClr>
+                  <a:buSzPct val="92000"/>
+                  <a:buFont typeface="Wingdings 2" panose="05020102010507070707" pitchFamily="18" charset="2"/>
+                  <a:buChar char=""/>
                 </a:pPr>
                 <a:r>
-                  <a:rPr lang="en-US" sz="2200">
+                  <a:rPr lang="en-US" sz="2000" dirty="0">
                     <a:latin typeface="Avenir Book" panose="02000503020000020003" pitchFamily="2" charset="0"/>
                   </a:rPr>
-                  <a:t>Singular Value Decomposition is the factorization of a rectangular matrix into three components:</a:t>
+                  <a:t>SVD is the factorization of a rectangular matrix into three components:</a:t>
                 </a:r>
-                <a:endParaRPr lang="en-US" sz="2200" i="1">
-                  <a:latin typeface="Cambria Math" panose="02040503050406030204" pitchFamily="18" charset="0"/>
+                <a:endParaRPr lang="en-US" sz="2000" i="1" dirty="0">
+                  <a:latin typeface="Avenir Book" panose="02000503020000020003" pitchFamily="2" charset="0"/>
                 </a:endParaRPr>
               </a:p>
               <a:p>
                 <a:pPr algn="ctr">
+                  <a:lnSpc>
+                    <a:spcPct val="150000"/>
+                  </a:lnSpc>
                   <a:spcAft>
                     <a:spcPts val="600"/>
                   </a:spcAft>
                 </a:pPr>
                 <a14:m>
+                  <m:oMathPara xmlns:m="http://schemas.openxmlformats.org/officeDocument/2006/math">
+                    <m:oMathParaPr>
+                      <m:jc m:val="centerGroup"/>
+                    </m:oMathParaPr>
+                    <m:oMath xmlns:m="http://schemas.openxmlformats.org/officeDocument/2006/math">
+                      <m:r>
+                        <a:rPr lang="en-US" sz="2000" i="1">
+                          <a:latin typeface="Cambria Math" panose="02040503050406030204" pitchFamily="18" charset="0"/>
+                        </a:rPr>
+                        <m:t>𝐴</m:t>
+                      </m:r>
+                      <m:r>
+                        <a:rPr lang="en-US" sz="2000" i="1">
+                          <a:latin typeface="Cambria Math" panose="02040503050406030204" pitchFamily="18" charset="0"/>
+                        </a:rPr>
+                        <m:t>=</m:t>
+                      </m:r>
+                      <m:r>
+                        <a:rPr lang="en-US" sz="2000" i="1">
+                          <a:latin typeface="Cambria Math" panose="02040503050406030204" pitchFamily="18" charset="0"/>
+                        </a:rPr>
+                        <m:t>𝑈</m:t>
+                      </m:r>
+                      <m:r>
+                        <a:rPr lang="en-US" sz="2000" i="1">
+                          <a:latin typeface="Cambria Math" panose="02040503050406030204" pitchFamily="18" charset="0"/>
+                        </a:rPr>
+                        <m:t>∗</m:t>
+                      </m:r>
+                      <m:r>
+                        <m:rPr>
+                          <m:sty m:val="p"/>
+                        </m:rPr>
+                        <a:rPr lang="el-GR" sz="2000" i="1">
+                          <a:latin typeface="Cambria Math" panose="02040503050406030204" pitchFamily="18" charset="0"/>
+                          <a:ea typeface="Cambria Math" panose="02040503050406030204" pitchFamily="18" charset="0"/>
+                        </a:rPr>
+                        <m:t>Σ</m:t>
+                      </m:r>
+                      <m:r>
+                        <a:rPr lang="en-US" sz="2000" i="1">
+                          <a:latin typeface="Cambria Math" panose="02040503050406030204" pitchFamily="18" charset="0"/>
+                          <a:ea typeface="Cambria Math" panose="02040503050406030204" pitchFamily="18" charset="0"/>
+                        </a:rPr>
+                        <m:t>∗</m:t>
+                      </m:r>
+                      <m:sSup>
+                        <m:sSupPr>
+                          <m:ctrlPr>
+                            <a:rPr lang="en-US" sz="2000" i="1">
+                              <a:latin typeface="Cambria Math" panose="02040503050406030204" pitchFamily="18" charset="0"/>
+                              <a:ea typeface="Cambria Math" panose="02040503050406030204" pitchFamily="18" charset="0"/>
+                            </a:rPr>
+                          </m:ctrlPr>
+                        </m:sSupPr>
+                        <m:e>
+                          <m:r>
+                            <a:rPr lang="en-US" sz="2000" i="1">
+                              <a:latin typeface="Cambria Math" panose="02040503050406030204" pitchFamily="18" charset="0"/>
+                              <a:ea typeface="Cambria Math" panose="02040503050406030204" pitchFamily="18" charset="0"/>
+                            </a:rPr>
+                            <m:t>𝑉</m:t>
+                          </m:r>
+                        </m:e>
+                        <m:sup>
+                          <m:r>
+                            <a:rPr lang="en-US" sz="2000" i="1">
+                              <a:latin typeface="Cambria Math" panose="02040503050406030204" pitchFamily="18" charset="0"/>
+                              <a:ea typeface="Cambria Math" panose="02040503050406030204" pitchFamily="18" charset="0"/>
+                            </a:rPr>
+                            <m:t>𝑇</m:t>
+                          </m:r>
+                        </m:sup>
+                      </m:sSup>
+                    </m:oMath>
+                  </m:oMathPara>
+                </a14:m>
+                <a:endParaRPr lang="en-US" sz="2000" dirty="0">
+                  <a:latin typeface="Avenir Book" panose="02000503020000020003" pitchFamily="2" charset="0"/>
+                </a:endParaRPr>
+              </a:p>
+              <a:p>
+                <a:pPr marL="285750" indent="-285750">
+                  <a:lnSpc>
+                    <a:spcPct val="150000"/>
+                  </a:lnSpc>
+                  <a:spcBef>
+                    <a:spcPct val="20000"/>
+                  </a:spcBef>
+                  <a:spcAft>
+                    <a:spcPts val="800"/>
+                  </a:spcAft>
+                  <a:buClr>
+                    <a:schemeClr val="accent2"/>
+                  </a:buClr>
+                  <a:buSzPct val="92000"/>
+                  <a:buFont typeface="Wingdings 2" panose="05020102010507070707" pitchFamily="18" charset="2"/>
+                  <a:buChar char=""/>
+                </a:pPr>
+                <a14:m>
                   <m:oMath xmlns:m="http://schemas.openxmlformats.org/officeDocument/2006/math">
                     <m:r>
-                      <a:rPr lang="en-US" sz="2200" i="1">
-                        <a:latin typeface="Cambria Math" panose="02040503050406030204" pitchFamily="18" charset="0"/>
-                      </a:rPr>
-                      <m:t>𝐴</m:t>
-                    </m:r>
-                    <m:r>
-                      <a:rPr lang="en-US" sz="2200" i="1">
-                        <a:latin typeface="Cambria Math" panose="02040503050406030204" pitchFamily="18" charset="0"/>
-                      </a:rPr>
-                      <m:t>=</m:t>
-                    </m:r>
-                    <m:r>
-                      <a:rPr lang="en-US" sz="2200" i="1">
+                      <a:rPr lang="en-US" sz="2000" i="1">
                         <a:latin typeface="Cambria Math" panose="02040503050406030204" pitchFamily="18" charset="0"/>
                       </a:rPr>
                       <m:t>𝑈</m:t>
                     </m:r>
-                    <m:r>
-                      <a:rPr lang="en-US" sz="2200" i="1">
-                        <a:latin typeface="Cambria Math" panose="02040503050406030204" pitchFamily="18" charset="0"/>
-                      </a:rPr>
-                      <m:t>∗</m:t>
-                    </m:r>
+                  </m:oMath>
+                </a14:m>
+                <a:r>
+                  <a:rPr lang="en-US" sz="2000" dirty="0">
+                    <a:latin typeface="Avenir Book" panose="02000503020000020003" pitchFamily="2" charset="0"/>
+                  </a:rPr>
+                  <a:t> is an orthogonal matrix composed of the left eigenvectors.</a:t>
+                </a:r>
+              </a:p>
+              <a:p>
+                <a:pPr marL="285750" indent="-285750">
+                  <a:lnSpc>
+                    <a:spcPct val="150000"/>
+                  </a:lnSpc>
+                  <a:spcBef>
+                    <a:spcPct val="20000"/>
+                  </a:spcBef>
+                  <a:spcAft>
+                    <a:spcPts val="800"/>
+                  </a:spcAft>
+                  <a:buClr>
+                    <a:schemeClr val="accent2"/>
+                  </a:buClr>
+                  <a:buSzPct val="92000"/>
+                  <a:buFont typeface="Wingdings 2" panose="05020102010507070707" pitchFamily="18" charset="2"/>
+                  <a:buChar char=""/>
+                </a:pPr>
+                <a14:m>
+                  <m:oMath xmlns:m="http://schemas.openxmlformats.org/officeDocument/2006/math">
                     <m:r>
                       <m:rPr>
                         <m:sty m:val="p"/>
                       </m:rPr>
-                      <a:rPr lang="el-GR" sz="2200" i="1">
+                      <a:rPr lang="el-GR" sz="2000" i="1">
                         <a:latin typeface="Cambria Math" panose="02040503050406030204" pitchFamily="18" charset="0"/>
                         <a:ea typeface="Cambria Math" panose="02040503050406030204" pitchFamily="18" charset="0"/>
                       </a:rPr>
                       <m:t>Σ</m:t>
                     </m:r>
-                    <m:r>
-                      <a:rPr lang="en-US" sz="2200" i="1">
-                        <a:latin typeface="Cambria Math" panose="02040503050406030204" pitchFamily="18" charset="0"/>
-                        <a:ea typeface="Cambria Math" panose="02040503050406030204" pitchFamily="18" charset="0"/>
-                      </a:rPr>
-                      <m:t>∗</m:t>
-                    </m:r>
+                  </m:oMath>
+                </a14:m>
+                <a:r>
+                  <a:rPr lang="en-US" sz="2000" dirty="0">
+                    <a:latin typeface="Avenir Book" panose="02000503020000020003" pitchFamily="2" charset="0"/>
+                  </a:rPr>
+                  <a:t> is a diagonalized matrix containing singular values in descending order of importance. </a:t>
+                </a:r>
+              </a:p>
+              <a:p>
+                <a:pPr marL="285750" indent="-285750">
+                  <a:lnSpc>
+                    <a:spcPct val="150000"/>
+                  </a:lnSpc>
+                  <a:spcBef>
+                    <a:spcPct val="20000"/>
+                  </a:spcBef>
+                  <a:spcAft>
+                    <a:spcPts val="800"/>
+                  </a:spcAft>
+                  <a:buClr>
+                    <a:schemeClr val="accent2"/>
+                  </a:buClr>
+                  <a:buSzPct val="92000"/>
+                  <a:buFont typeface="Wingdings 2" panose="05020102010507070707" pitchFamily="18" charset="2"/>
+                  <a:buChar char=""/>
+                </a:pPr>
+                <a14:m>
+                  <m:oMath xmlns:m="http://schemas.openxmlformats.org/officeDocument/2006/math">
                     <m:sSup>
                       <m:sSupPr>
                         <m:ctrlPr>
-                          <a:rPr lang="en-US" sz="2200" i="1">
+                          <a:rPr lang="en-US" sz="2000" i="1">
                             <a:latin typeface="Cambria Math" panose="02040503050406030204" pitchFamily="18" charset="0"/>
                             <a:ea typeface="Cambria Math" panose="02040503050406030204" pitchFamily="18" charset="0"/>
                           </a:rPr>
@@ -9034,7 +9227,7 @@
                       </m:sSupPr>
                       <m:e>
                         <m:r>
-                          <a:rPr lang="en-US" sz="2200" i="1">
+                          <a:rPr lang="en-US" sz="2000" i="1">
                             <a:latin typeface="Cambria Math" panose="02040503050406030204" pitchFamily="18" charset="0"/>
                             <a:ea typeface="Cambria Math" panose="02040503050406030204" pitchFamily="18" charset="0"/>
                           </a:rPr>
@@ -9043,7 +9236,7 @@
                       </m:e>
                       <m:sup>
                         <m:r>
-                          <a:rPr lang="en-US" sz="2200" i="1">
+                          <a:rPr lang="en-US" sz="2000" i="1">
                             <a:latin typeface="Cambria Math" panose="02040503050406030204" pitchFamily="18" charset="0"/>
                             <a:ea typeface="Cambria Math" panose="02040503050406030204" pitchFamily="18" charset="0"/>
                           </a:rPr>
@@ -9054,136 +9247,41 @@
                   </m:oMath>
                 </a14:m>
                 <a:r>
-                  <a:rPr lang="en-US" sz="2200">
-                    <a:latin typeface="Avenir Book" panose="02000503020000020003" pitchFamily="2" charset="0"/>
-                  </a:rPr>
-                  <a:t> </a:t>
-                </a:r>
-              </a:p>
-              <a:p>
-                <a:pPr algn="ctr">
-                  <a:spcAft>
-                    <a:spcPts val="600"/>
-                  </a:spcAft>
-                </a:pPr>
-                <a:endParaRPr lang="en-US" sz="2200">
-                  <a:latin typeface="Avenir Book" panose="02000503020000020003" pitchFamily="2" charset="0"/>
-                </a:endParaRPr>
-              </a:p>
-              <a:p>
-                <a:pPr marL="342900" indent="-342900">
-                  <a:spcAft>
-                    <a:spcPts val="1800"/>
-                  </a:spcAft>
-                  <a:buFont typeface="Arial" panose="020B0604020202020204" pitchFamily="34" charset="0"/>
-                  <a:buChar char="•"/>
-                </a:pPr>
-                <a14:m>
-                  <m:oMath xmlns:m="http://schemas.openxmlformats.org/officeDocument/2006/math">
-                    <m:r>
-                      <m:rPr>
-                        <m:sty m:val="p"/>
-                      </m:rPr>
-                      <a:rPr lang="el-GR" sz="2200" i="1">
-                        <a:latin typeface="Cambria Math" panose="02040503050406030204" pitchFamily="18" charset="0"/>
-                        <a:ea typeface="Cambria Math" panose="02040503050406030204" pitchFamily="18" charset="0"/>
-                      </a:rPr>
-                      <m:t>Σ</m:t>
-                    </m:r>
-                  </m:oMath>
-                </a14:m>
-                <a:r>
-                  <a:rPr lang="en-US" sz="2200">
-                    <a:latin typeface="Avenir Book" panose="02000503020000020003" pitchFamily="2" charset="0"/>
-                  </a:rPr>
-                  <a:t> is a diagonalized matrix containing singular values in descending order of importance. </a:t>
-                </a:r>
-                <a:endParaRPr lang="en-US" sz="2200" i="1">
-                  <a:latin typeface="Cambria Math" panose="02040503050406030204" pitchFamily="18" charset="0"/>
-                </a:endParaRPr>
-              </a:p>
-              <a:p>
-                <a:pPr marL="342900" indent="-342900">
-                  <a:spcAft>
-                    <a:spcPts val="1800"/>
-                  </a:spcAft>
-                  <a:buFont typeface="Arial" panose="020B0604020202020204" pitchFamily="34" charset="0"/>
-                  <a:buChar char="•"/>
-                </a:pPr>
-                <a14:m>
-                  <m:oMath xmlns:m="http://schemas.openxmlformats.org/officeDocument/2006/math">
-                    <m:r>
-                      <a:rPr lang="en-US" sz="2200" i="1">
-                        <a:latin typeface="Cambria Math" panose="02040503050406030204" pitchFamily="18" charset="0"/>
-                      </a:rPr>
-                      <m:t>𝑈</m:t>
-                    </m:r>
-                  </m:oMath>
-                </a14:m>
-                <a:r>
-                  <a:rPr lang="en-US" sz="2200">
-                    <a:latin typeface="Avenir Book" panose="02000503020000020003" pitchFamily="2" charset="0"/>
-                  </a:rPr>
-                  <a:t> is an orthogonal matrix composed of the left eigenvectors, while </a:t>
-                </a:r>
-                <a14:m>
-                  <m:oMath xmlns:m="http://schemas.openxmlformats.org/officeDocument/2006/math">
-                    <m:sSup>
-                      <m:sSupPr>
-                        <m:ctrlPr>
-                          <a:rPr lang="en-US" sz="2200" i="1">
-                            <a:latin typeface="Cambria Math" panose="02040503050406030204" pitchFamily="18" charset="0"/>
-                            <a:ea typeface="Cambria Math" panose="02040503050406030204" pitchFamily="18" charset="0"/>
-                          </a:rPr>
-                        </m:ctrlPr>
-                      </m:sSupPr>
-                      <m:e>
-                        <m:r>
-                          <a:rPr lang="en-US" sz="2200" i="1">
-                            <a:latin typeface="Cambria Math" panose="02040503050406030204" pitchFamily="18" charset="0"/>
-                            <a:ea typeface="Cambria Math" panose="02040503050406030204" pitchFamily="18" charset="0"/>
-                          </a:rPr>
-                          <m:t>𝑉</m:t>
-                        </m:r>
-                      </m:e>
-                      <m:sup>
-                        <m:r>
-                          <a:rPr lang="en-US" sz="2200" i="1">
-                            <a:latin typeface="Cambria Math" panose="02040503050406030204" pitchFamily="18" charset="0"/>
-                            <a:ea typeface="Cambria Math" panose="02040503050406030204" pitchFamily="18" charset="0"/>
-                          </a:rPr>
-                          <m:t>𝑇</m:t>
-                        </m:r>
-                      </m:sup>
-                    </m:sSup>
-                  </m:oMath>
-                </a14:m>
-                <a:r>
-                  <a:rPr lang="en-US" sz="2200">
+                  <a:rPr lang="en-US" sz="2000" dirty="0">
                     <a:latin typeface="Avenir Book" panose="02000503020000020003" pitchFamily="2" charset="0"/>
                   </a:rPr>
                   <a:t> is an orthogonal matrix composed of the right eigenvectors.</a:t>
                 </a:r>
               </a:p>
               <a:p>
-                <a:pPr marL="342900" indent="-342900">
+                <a:pPr marL="285750" indent="-285750">
+                  <a:lnSpc>
+                    <a:spcPct val="150000"/>
+                  </a:lnSpc>
+                  <a:spcBef>
+                    <a:spcPct val="20000"/>
+                  </a:spcBef>
                   <a:spcAft>
-                    <a:spcPts val="1800"/>
+                    <a:spcPts val="800"/>
                   </a:spcAft>
-                  <a:buFont typeface="Arial" panose="020B0604020202020204" pitchFamily="34" charset="0"/>
-                  <a:buChar char="•"/>
+                  <a:buClr>
+                    <a:schemeClr val="accent2"/>
+                  </a:buClr>
+                  <a:buSzPct val="92000"/>
+                  <a:buFont typeface="Wingdings 2" panose="05020102010507070707" pitchFamily="18" charset="2"/>
+                  <a:buChar char=""/>
                 </a:pPr>
                 <a:r>
-                  <a:rPr lang="en-US" sz="2200">
+                  <a:rPr lang="en-US" sz="2000" dirty="0">
                     <a:latin typeface="Avenir Book" panose="02000503020000020003" pitchFamily="2" charset="0"/>
                   </a:rPr>
-                  <a:t>The SciPy library was used to perform the SVD calculation.</a:t>
+                  <a:t>Python SciPy library was used to perform the SVD calculation.</a:t>
                 </a:r>
               </a:p>
             </p:txBody>
           </p:sp>
         </mc:Choice>
-        <mc:Fallback>
+        <mc:Fallback xmlns="">
           <p:sp>
             <p:nvSpPr>
               <p:cNvPr id="4" name="TextBox 3">
@@ -9201,7 +9299,7 @@
             <p:spPr>
               <a:xfrm>
                 <a:off x="575894" y="2205533"/>
-                <a:ext cx="11243574" cy="3077766"/>
+                <a:ext cx="11243574" cy="3555910"/>
               </a:xfrm>
               <a:prstGeom prst="rect">
                 <a:avLst/>
@@ -9209,7 +9307,7 @@
               <a:blipFill>
                 <a:blip r:embed="rId2"/>
                 <a:stretch>
-                  <a:fillRect l="-677" t="-1230" b="-24180"/>
+                  <a:fillRect l="-339" b="-2135"/>
                 </a:stretch>
               </a:blipFill>
             </p:spPr>
@@ -9228,6 +9326,53 @@
           </p:sp>
         </mc:Fallback>
       </mc:AlternateContent>
+      <p:pic>
+        <p:nvPicPr>
+          <p:cNvPr id="1028" name="Picture 4" descr="A Beginner's Guide to Singular Value Decomposition (SVD) | by Mukundh  Murthy | Medium">
+            <a:extLst>
+              <a:ext uri="{FF2B5EF4-FFF2-40B4-BE49-F238E27FC236}">
+                <a16:creationId xmlns:a16="http://schemas.microsoft.com/office/drawing/2014/main" id="{031BAC2E-A49F-86FB-C663-AF3DF5DE13D6}"/>
+              </a:ext>
+            </a:extLst>
+          </p:cNvPr>
+          <p:cNvPicPr>
+            <a:picLocks noChangeAspect="1" noChangeArrowheads="1"/>
+          </p:cNvPicPr>
+          <p:nvPr/>
+        </p:nvPicPr>
+        <p:blipFill>
+          <a:blip r:embed="rId3">
+            <a:extLst>
+              <a:ext uri="{28A0092B-C50C-407E-A947-70E740481C1C}">
+                <a14:useLocalDpi xmlns:a14="http://schemas.microsoft.com/office/drawing/2010/main" val="0"/>
+              </a:ext>
+            </a:extLst>
+          </a:blip>
+          <a:srcRect/>
+          <a:stretch>
+            <a:fillRect/>
+          </a:stretch>
+        </p:blipFill>
+        <p:spPr bwMode="auto">
+          <a:xfrm>
+            <a:off x="8489033" y="4585915"/>
+            <a:ext cx="3116477" cy="1819688"/>
+          </a:xfrm>
+          <a:prstGeom prst="rect">
+            <a:avLst/>
+          </a:prstGeom>
+          <a:noFill/>
+          <a:extLst>
+            <a:ext uri="{909E8E84-426E-40DD-AFC4-6F175D3DCCD1}">
+              <a14:hiddenFill xmlns:a14="http://schemas.microsoft.com/office/drawing/2010/main">
+                <a:solidFill>
+                  <a:srgbClr val="FFFFFF"/>
+                </a:solidFill>
+              </a14:hiddenFill>
+            </a:ext>
+          </a:extLst>
+        </p:spPr>
+      </p:pic>
     </p:spTree>
     <p:extLst>
       <p:ext uri="{BB962C8B-B14F-4D97-AF65-F5344CB8AC3E}">
@@ -9280,7 +9425,7 @@
           <a:lstStyle/>
           <a:p>
             <a:r>
-              <a:rPr lang="en-US"/>
+              <a:rPr lang="en-US" dirty="0"/>
               <a:t>Rank-12 matrix approximations</a:t>
             </a:r>
           </a:p>
@@ -9301,7 +9446,7 @@
         <p:spPr>
           <a:xfrm>
             <a:off x="575894" y="2315907"/>
-            <a:ext cx="10752506" cy="1785104"/>
+            <a:ext cx="10752506" cy="1139864"/>
           </a:xfrm>
           <a:prstGeom prst="rect">
             <a:avLst/>
@@ -9315,35 +9460,52 @@
           <a:lstStyle/>
           <a:p>
             <a:pPr marL="285750" indent="-285750">
-              <a:buFont typeface="Arial" panose="020B0604020202020204" pitchFamily="34" charset="0"/>
-              <a:buChar char="•"/>
+              <a:lnSpc>
+                <a:spcPct val="150000"/>
+              </a:lnSpc>
+              <a:spcBef>
+                <a:spcPct val="20000"/>
+              </a:spcBef>
+              <a:spcAft>
+                <a:spcPts val="800"/>
+              </a:spcAft>
+              <a:buClr>
+                <a:schemeClr val="accent2"/>
+              </a:buClr>
+              <a:buSzPct val="92000"/>
+              <a:buFont typeface="Wingdings 2" panose="05020102010507070707" pitchFamily="18" charset="2"/>
+              <a:buChar char=""/>
             </a:pPr>
             <a:r>
-              <a:rPr lang="en-US" sz="2200">
-                <a:latin typeface="Avenir Book"/>
+              <a:rPr lang="en-US" sz="2000" dirty="0">
+                <a:latin typeface="Avenir Book" panose="02000503020000020003" pitchFamily="2" charset="0"/>
               </a:rPr>
-              <a:t>Once organizing the data into different digit sets of stacked matrices, we performed SVD on each separate set. </a:t>
+              <a:t>SVD was performed on each separate digit set from the dictionary.</a:t>
             </a:r>
           </a:p>
           <a:p>
             <a:pPr marL="285750" indent="-285750">
-              <a:buFont typeface="Arial" panose="020B0604020202020204" pitchFamily="34" charset="0"/>
-              <a:buChar char="•"/>
+              <a:lnSpc>
+                <a:spcPct val="150000"/>
+              </a:lnSpc>
+              <a:spcBef>
+                <a:spcPct val="20000"/>
+              </a:spcBef>
+              <a:spcAft>
+                <a:spcPts val="800"/>
+              </a:spcAft>
+              <a:buClr>
+                <a:schemeClr val="accent2"/>
+              </a:buClr>
+              <a:buSzPct val="92000"/>
+              <a:buFont typeface="Wingdings 2" panose="05020102010507070707" pitchFamily="18" charset="2"/>
+              <a:buChar char=""/>
             </a:pPr>
-            <a:endParaRPr lang="en-US" sz="2200">
-              <a:latin typeface="Avenir Book"/>
-            </a:endParaRPr>
-          </a:p>
-          <a:p>
-            <a:pPr marL="285750" indent="-285750">
-              <a:buFont typeface="Arial" panose="020B0604020202020204" pitchFamily="34" charset="0"/>
-              <a:buChar char="•"/>
-            </a:pPr>
-            <a:r>
-              <a:rPr lang="en-US" sz="2200">
-                <a:latin typeface="Avenir Book"/>
+            <a:r>
+              <a:rPr lang="en-US" sz="2000" dirty="0">
+                <a:latin typeface="Avenir Book" panose="02000503020000020003" pitchFamily="2" charset="0"/>
               </a:rPr>
-              <a:t>The rank-12 matrix approximations are below, in which each digit—while vague in precise form—is visible.</a:t>
+              <a:t>The rank-12 matrix approximations for each digit, while vague in precise form, are visible.</a:t>
             </a:r>
           </a:p>
         </p:txBody>
@@ -9362,10 +9524,10 @@
         </p:nvGrpSpPr>
         <p:grpSpPr>
           <a:xfrm>
-            <a:off x="862897" y="4615196"/>
-            <a:ext cx="10430209" cy="1355506"/>
+            <a:off x="875597" y="4053683"/>
+            <a:ext cx="10430209" cy="1263173"/>
             <a:chOff x="1488168" y="23536461"/>
-            <a:chExt cx="12955764" cy="1683727"/>
+            <a:chExt cx="12955764" cy="1569037"/>
           </a:xfrm>
         </p:grpSpPr>
         <p:pic>
@@ -9412,7 +9574,7 @@
           <p:spPr>
             <a:xfrm>
               <a:off x="1841787" y="24723196"/>
-              <a:ext cx="9789815" cy="496992"/>
+              <a:ext cx="9789815" cy="382302"/>
             </a:xfrm>
             <a:prstGeom prst="rect">
               <a:avLst/>
@@ -9426,7 +9588,7 @@
             <a:lstStyle/>
             <a:p>
               <a:r>
-                <a:rPr lang="en-US" sz="2000" i="1">
+                <a:rPr lang="en-US" sz="1400" i="1" dirty="0">
                   <a:latin typeface="Avenir Book" panose="02000503020000020003" pitchFamily="2" charset="0"/>
                 </a:rPr>
                 <a:t>Rank-12 matrix approximations images for each digit.</a:t>
@@ -9546,8 +9708,8 @@
         </p:nvSpPr>
         <p:spPr>
           <a:xfrm>
-            <a:off x="2668079" y="5600669"/>
-            <a:ext cx="6845245" cy="400110"/>
+            <a:off x="1321193" y="5492947"/>
+            <a:ext cx="6845245" cy="307777"/>
           </a:xfrm>
           <a:prstGeom prst="rect">
             <a:avLst/>
@@ -9561,12 +9723,12 @@
           <a:lstStyle/>
           <a:p>
             <a:r>
-              <a:rPr lang="en-US" sz="2000" i="1">
+              <a:rPr lang="en-US" sz="1400" i="1" dirty="0">
                 <a:latin typeface="Avenir Book"/>
               </a:rPr>
               <a:t>Plot of first 20 singular values for each digit, 0 through 9. </a:t>
             </a:r>
-            <a:endParaRPr lang="en-US"/>
+            <a:endParaRPr lang="en-US" sz="1400" dirty="0"/>
           </a:p>
         </p:txBody>
       </p:sp>
@@ -9622,8 +9784,8 @@
           <a:lstStyle/>
           <a:p>
             <a:r>
-              <a:rPr lang="en-US"/>
-              <a:t>Methods – Selecting approximation Rank</a:t>
+              <a:rPr lang="en-US" dirty="0"/>
+              <a:t>Selecting the OPTIMAL approximation Rank</a:t>
             </a:r>
           </a:p>
         </p:txBody>
@@ -9643,7 +9805,7 @@
         <p:spPr>
           <a:xfrm>
             <a:off x="575894" y="2274838"/>
-            <a:ext cx="10701706" cy="2800767"/>
+            <a:ext cx="10701706" cy="2288896"/>
           </a:xfrm>
           <a:prstGeom prst="rect">
             <a:avLst/>
@@ -9656,67 +9818,92 @@
           </a:bodyPr>
           <a:lstStyle/>
           <a:p>
-            <a:pPr marL="342900" indent="-342900">
-              <a:buFont typeface="Arial" panose="020B0604020202020204" pitchFamily="34" charset="0"/>
-              <a:buChar char="•"/>
+            <a:pPr>
+              <a:lnSpc>
+                <a:spcPct val="150000"/>
+              </a:lnSpc>
             </a:pPr>
             <a:r>
-              <a:rPr lang="en-US" sz="2200">
+              <a:rPr lang="en-US" sz="2000" dirty="0">
                 <a:latin typeface="Avenir Book"/>
               </a:rPr>
-              <a:t>After reviewing the singular value plots, we sought to reduce the dimensionality of our data without sacrificing accuracy. </a:t>
-            </a:r>
-            <a:endParaRPr lang="en-US" sz="2200">
-              <a:latin typeface="Avenir Book" panose="02000503020000020003" pitchFamily="2" charset="0"/>
-            </a:endParaRPr>
-          </a:p>
-          <a:p>
-            <a:pPr marL="342900" indent="-342900">
-              <a:buFont typeface="Arial" panose="020B0604020202020204" pitchFamily="34" charset="0"/>
-              <a:buChar char="•"/>
+              <a:t>Based on the singular value plots:</a:t>
+            </a:r>
+          </a:p>
+          <a:p>
+            <a:pPr marL="285750" indent="-285750">
+              <a:lnSpc>
+                <a:spcPct val="150000"/>
+              </a:lnSpc>
+              <a:spcBef>
+                <a:spcPct val="20000"/>
+              </a:spcBef>
+              <a:spcAft>
+                <a:spcPts val="800"/>
+              </a:spcAft>
+              <a:buClr>
+                <a:schemeClr val="accent2"/>
+              </a:buClr>
+              <a:buSzPct val="92000"/>
+              <a:buFont typeface="Wingdings 2" panose="05020102010507070707" pitchFamily="18" charset="2"/>
+              <a:buChar char=""/>
             </a:pPr>
-            <a:endParaRPr lang="en-US" sz="2200">
-              <a:latin typeface="Avenir Book" panose="02000503020000020003" pitchFamily="2" charset="0"/>
-            </a:endParaRPr>
-          </a:p>
-          <a:p>
-            <a:pPr marL="342900" indent="-342900">
-              <a:buFont typeface="Arial" panose="020B0604020202020204" pitchFamily="34" charset="0"/>
-              <a:buChar char="•"/>
-            </a:pPr>
-            <a:r>
-              <a:rPr lang="en-US" sz="2200">
+            <a:r>
+              <a:rPr lang="en-US" sz="2000" dirty="0">
                 <a:latin typeface="Avenir Book"/>
               </a:rPr>
-              <a:t>Based on the plots, we conjectured that our desired peak accuracy would be within the first 20 approximations. </a:t>
-            </a:r>
-            <a:endParaRPr lang="en-US" sz="2200">
-              <a:latin typeface="Avenir Book" panose="02000503020000020003" pitchFamily="2" charset="0"/>
-            </a:endParaRPr>
-          </a:p>
-          <a:p>
-            <a:pPr marL="342900" indent="-342900">
-              <a:buFont typeface="Arial" panose="020B0604020202020204" pitchFamily="34" charset="0"/>
-              <a:buChar char="•"/>
+              <a:t>We sought to reduce the dimensionality of our data without sacrificing accuracy. </a:t>
+            </a:r>
+          </a:p>
+          <a:p>
+            <a:pPr marL="285750" indent="-285750">
+              <a:lnSpc>
+                <a:spcPct val="150000"/>
+              </a:lnSpc>
+              <a:spcBef>
+                <a:spcPct val="20000"/>
+              </a:spcBef>
+              <a:spcAft>
+                <a:spcPts val="800"/>
+              </a:spcAft>
+              <a:buClr>
+                <a:schemeClr val="accent2"/>
+              </a:buClr>
+              <a:buSzPct val="92000"/>
+              <a:buFont typeface="Wingdings 2" panose="05020102010507070707" pitchFamily="18" charset="2"/>
+              <a:buChar char=""/>
             </a:pPr>
-            <a:endParaRPr lang="en-US" sz="2200">
-              <a:latin typeface="Avenir Book" panose="02000503020000020003" pitchFamily="2" charset="0"/>
-            </a:endParaRPr>
-          </a:p>
-          <a:p>
-            <a:pPr marL="342900" indent="-342900">
-              <a:buFont typeface="Arial" panose="020B0604020202020204" pitchFamily="34" charset="0"/>
-              <a:buChar char="•"/>
-            </a:pPr>
-            <a:r>
-              <a:rPr lang="en-US" sz="2200">
+            <a:r>
+              <a:rPr lang="en-US" sz="2000" dirty="0">
                 <a:latin typeface="Avenir Book"/>
               </a:rPr>
-              <a:t>We ran a linear least squares classification algorithm from ranks 1-20 to search for our optimal approximation rank.</a:t>
-            </a:r>
-            <a:endParaRPr lang="en-US" sz="2200">
-              <a:latin typeface="Avenir Book" panose="02000503020000020003" pitchFamily="2" charset="0"/>
-            </a:endParaRPr>
+              <a:t>We conjectured that the desired peak accuracy was within the first 20 approximations. </a:t>
+            </a:r>
+          </a:p>
+          <a:p>
+            <a:pPr marL="285750" indent="-285750">
+              <a:lnSpc>
+                <a:spcPct val="150000"/>
+              </a:lnSpc>
+              <a:spcBef>
+                <a:spcPct val="20000"/>
+              </a:spcBef>
+              <a:spcAft>
+                <a:spcPts val="800"/>
+              </a:spcAft>
+              <a:buClr>
+                <a:schemeClr val="accent2"/>
+              </a:buClr>
+              <a:buSzPct val="92000"/>
+              <a:buFont typeface="Wingdings 2" panose="05020102010507070707" pitchFamily="18" charset="2"/>
+              <a:buChar char=""/>
+            </a:pPr>
+            <a:r>
+              <a:rPr lang="en-US" sz="2000" dirty="0">
+                <a:latin typeface="Avenir Book"/>
+              </a:rPr>
+              <a:t>Ran the Linear Least squares algorithm from ranks 1 to 20.</a:t>
+            </a:r>
           </a:p>
         </p:txBody>
       </p:sp>
